--- a/docs/presentation_escapade_v2.pptx
+++ b/docs/presentation_escapade_v2.pptx
@@ -9,10 +9,10 @@
     <p:sldId id="257" r:id="rId8"/>
     <p:sldId id="258" r:id="rId9"/>
     <p:sldId id="259" r:id="rId10"/>
-    <p:sldId id="260" r:id="rId11"/>
     <p:sldId id="261" r:id="rId12"/>
     <p:sldId id="262" r:id="rId13"/>
     <p:sldId id="263" r:id="rId14"/>
+    <p:sldId id="268" r:id="rId19"/>
     <p:sldId id="264" r:id="rId15"/>
     <p:sldId id="265" r:id="rId16"/>
     <p:sldId id="266" r:id="rId17"/>
@@ -7097,7 +7097,7 @@
                 </a:solidFill>
                 <a:latin typeface="Segoe UI"/>
               </a:rPr>
-              <a:t>⌨️  CLI + rapport HTML — carte Leaflet</a:t>
+              <a:t>⌨️  CLI — classement + reco dans le terminal</a:t>
             </a:r>
           </a:p>
         </p:txBody>
@@ -7485,7 +7485,7 @@
                 </a:solidFill>
                 <a:latin typeface="Segoe UI"/>
               </a:rPr>
-              <a:t>Démo — rapport HTML partageable</a:t>
+              <a:t>Architecture</a:t>
             </a:r>
           </a:p>
         </p:txBody>
@@ -7527,7 +7527,7 @@
                 </a:solidFill>
                 <a:latin typeface="Segoe UI"/>
               </a:rPr>
-              <a:t>Généré en 1 commande · cartes + carte Leaflet/OpenStreetMap</a:t>
+              <a:t>Un connecteur par source · tout passe par un cache JSON avec repli automatique</a:t>
             </a:r>
           </a:p>
         </p:txBody>
@@ -7574,45 +7574,1118 @@
           </a:p>
         </p:txBody>
       </p:sp>
-      <p:pic>
-        <p:nvPicPr>
-          <p:cNvPr id="6" name="Picture 5" descr="report.png"/>
-          <p:cNvPicPr>
-            <a:picLocks noChangeAspect="1"/>
-          </p:cNvPicPr>
-          <p:nvPr/>
-        </p:nvPicPr>
-        <p:blipFill>
-          <a:blip r:embed="rId2"/>
-          <a:stretch>
-            <a:fillRect/>
-          </a:stretch>
-        </p:blipFill>
-        <p:spPr>
-          <a:xfrm>
-            <a:off x="1874519" y="1572768"/>
-            <a:ext cx="9847607" cy="4754880"/>
-          </a:xfrm>
-          <a:prstGeom prst="rect">
-            <a:avLst/>
-          </a:prstGeom>
-          <a:ln w="19050">
+      <p:sp>
+        <p:nvSpPr>
+          <p:cNvPr id="6" name="Rounded Rectangle 5"/>
+          <p:cNvSpPr/>
+          <p:nvPr/>
+        </p:nvSpPr>
+        <p:spPr>
+          <a:xfrm>
+            <a:off x="4498848" y="1481328"/>
+            <a:ext cx="3200400" cy="530352"/>
+          </a:xfrm>
+          <a:prstGeom prst="roundRect">
+            <a:avLst/>
+          </a:prstGeom>
+          <a:solidFill>
+            <a:srgbClr val="334155"/>
+          </a:solidFill>
+          <a:ln>
+            <a:noFill/>
+          </a:ln>
+          <a:effectLst/>
+        </p:spPr>
+        <p:style>
+          <a:lnRef idx="1">
+            <a:schemeClr val="accent1"/>
+          </a:lnRef>
+          <a:fillRef idx="3">
+            <a:schemeClr val="accent1"/>
+          </a:fillRef>
+          <a:effectRef idx="2">
+            <a:schemeClr val="accent1"/>
+          </a:effectRef>
+          <a:fontRef idx="minor">
+            <a:schemeClr val="lt1"/>
+          </a:fontRef>
+        </p:style>
+        <p:txBody>
+          <a:bodyPr rtlCol="0" anchor="ctr"/>
+          <a:lstStyle/>
+          <a:p>
+            <a:pPr algn="ctr"/>
+          </a:p>
+        </p:txBody>
+      </p:sp>
+      <p:sp>
+        <p:nvSpPr>
+          <p:cNvPr id="7" name="TextBox 6"/>
+          <p:cNvSpPr txBox="1"/>
+          <p:nvPr/>
+        </p:nvSpPr>
+        <p:spPr>
+          <a:xfrm>
+            <a:off x="4498848" y="1481328"/>
+            <a:ext cx="3200400" cy="530352"/>
+          </a:xfrm>
+          <a:prstGeom prst="rect">
+            <a:avLst/>
+          </a:prstGeom>
+          <a:noFill/>
+        </p:spPr>
+        <p:txBody>
+          <a:bodyPr wrap="square" anchor="ctr">
+            <a:spAutoFit/>
+          </a:bodyPr>
+          <a:lstStyle/>
+          <a:p>
+            <a:pPr algn="ctr">
+              <a:lnSpc>
+                <a:spcPct val="100000"/>
+              </a:lnSpc>
+              <a:spcAft>
+                <a:spcPts val="0"/>
+              </a:spcAft>
+            </a:pPr>
+            <a:r>
+              <a:rPr sz="1500" b="1">
+                <a:solidFill>
+                  <a:srgbClr val="E2E8F0"/>
+                </a:solidFill>
+                <a:latin typeface="Segoe UI"/>
+              </a:rPr>
+              <a:t>👤  Utilisateur</a:t>
+            </a:r>
+          </a:p>
+        </p:txBody>
+      </p:sp>
+      <p:sp>
+        <p:nvSpPr>
+          <p:cNvPr id="8" name="Down Arrow 7"/>
+          <p:cNvSpPr/>
+          <p:nvPr/>
+        </p:nvSpPr>
+        <p:spPr>
+          <a:xfrm>
+            <a:off x="5998464" y="2084831"/>
+            <a:ext cx="201168" cy="292608"/>
+          </a:xfrm>
+          <a:prstGeom prst="downArrow">
+            <a:avLst/>
+          </a:prstGeom>
+          <a:solidFill>
+            <a:srgbClr val="38BDF8"/>
+          </a:solidFill>
+          <a:ln>
+            <a:noFill/>
+          </a:ln>
+          <a:effectLst/>
+        </p:spPr>
+        <p:style>
+          <a:lnRef idx="1">
+            <a:schemeClr val="accent1"/>
+          </a:lnRef>
+          <a:fillRef idx="3">
+            <a:schemeClr val="accent1"/>
+          </a:fillRef>
+          <a:effectRef idx="2">
+            <a:schemeClr val="accent1"/>
+          </a:effectRef>
+          <a:fontRef idx="minor">
+            <a:schemeClr val="lt1"/>
+          </a:fontRef>
+        </p:style>
+        <p:txBody>
+          <a:bodyPr rtlCol="0" anchor="ctr"/>
+          <a:lstStyle/>
+          <a:p>
+            <a:pPr algn="ctr"/>
+          </a:p>
+        </p:txBody>
+      </p:sp>
+      <p:sp>
+        <p:nvSpPr>
+          <p:cNvPr id="9" name="Rounded Rectangle 8"/>
+          <p:cNvSpPr/>
+          <p:nvPr/>
+        </p:nvSpPr>
+        <p:spPr>
+          <a:xfrm>
+            <a:off x="2670048" y="2432304"/>
+            <a:ext cx="6858000" cy="566928"/>
+          </a:xfrm>
+          <a:prstGeom prst="roundRect">
+            <a:avLst/>
+          </a:prstGeom>
+          <a:solidFill>
+            <a:srgbClr val="1E293B"/>
+          </a:solidFill>
+          <a:ln>
+            <a:noFill/>
+          </a:ln>
+          <a:effectLst/>
+        </p:spPr>
+        <p:style>
+          <a:lnRef idx="1">
+            <a:schemeClr val="accent1"/>
+          </a:lnRef>
+          <a:fillRef idx="3">
+            <a:schemeClr val="accent1"/>
+          </a:fillRef>
+          <a:effectRef idx="2">
+            <a:schemeClr val="accent1"/>
+          </a:effectRef>
+          <a:fontRef idx="minor">
+            <a:schemeClr val="lt1"/>
+          </a:fontRef>
+        </p:style>
+        <p:txBody>
+          <a:bodyPr rtlCol="0" anchor="ctr"/>
+          <a:lstStyle/>
+          <a:p>
+            <a:pPr algn="ctr"/>
+          </a:p>
+        </p:txBody>
+      </p:sp>
+      <p:sp>
+        <p:nvSpPr>
+          <p:cNvPr id="10" name="TextBox 9"/>
+          <p:cNvSpPr txBox="1"/>
+          <p:nvPr/>
+        </p:nvSpPr>
+        <p:spPr>
+          <a:xfrm>
+            <a:off x="2670048" y="2432304"/>
+            <a:ext cx="6858000" cy="566928"/>
+          </a:xfrm>
+          <a:prstGeom prst="rect">
+            <a:avLst/>
+          </a:prstGeom>
+          <a:noFill/>
+        </p:spPr>
+        <p:txBody>
+          <a:bodyPr wrap="square" anchor="ctr">
+            <a:spAutoFit/>
+          </a:bodyPr>
+          <a:lstStyle/>
+          <a:p>
+            <a:pPr algn="ctr">
+              <a:lnSpc>
+                <a:spcPct val="100000"/>
+              </a:lnSpc>
+              <a:spcAft>
+                <a:spcPts val="0"/>
+              </a:spcAft>
+            </a:pPr>
+            <a:r>
+              <a:rPr sz="1400" b="1">
+                <a:solidFill>
+                  <a:srgbClr val="38BDF8"/>
+                </a:solidFill>
+                <a:latin typeface="Consolas"/>
+              </a:rPr>
+              <a:t>app.py</a:t>
+            </a:r>
+            <a:r>
+              <a:rPr sz="1400" b="1">
+                <a:solidFill>
+                  <a:srgbClr val="E2E8F0"/>
+                </a:solidFill>
+                <a:latin typeface="Segoe UI"/>
+              </a:rPr>
+              <a:t> (Streamlit)   ·   </a:t>
+            </a:r>
+            <a:r>
+              <a:rPr sz="1400" b="1">
+                <a:solidFill>
+                  <a:srgbClr val="38BDF8"/>
+                </a:solidFill>
+                <a:latin typeface="Consolas"/>
+              </a:rPr>
+              <a:t>recommender.py</a:t>
+            </a:r>
+            <a:r>
+              <a:rPr sz="1400" b="1">
+                <a:solidFill>
+                  <a:srgbClr val="E2E8F0"/>
+                </a:solidFill>
+                <a:latin typeface="Segoe UI"/>
+              </a:rPr>
+              <a:t> (CLI)</a:t>
+            </a:r>
+          </a:p>
+        </p:txBody>
+      </p:sp>
+      <p:sp>
+        <p:nvSpPr>
+          <p:cNvPr id="11" name="Down Arrow 10"/>
+          <p:cNvSpPr/>
+          <p:nvPr/>
+        </p:nvSpPr>
+        <p:spPr>
+          <a:xfrm>
+            <a:off x="5998464" y="3054096"/>
+            <a:ext cx="201168" cy="292608"/>
+          </a:xfrm>
+          <a:prstGeom prst="downArrow">
+            <a:avLst/>
+          </a:prstGeom>
+          <a:solidFill>
+            <a:srgbClr val="38BDF8"/>
+          </a:solidFill>
+          <a:ln>
+            <a:noFill/>
+          </a:ln>
+          <a:effectLst/>
+        </p:spPr>
+        <p:style>
+          <a:lnRef idx="1">
+            <a:schemeClr val="accent1"/>
+          </a:lnRef>
+          <a:fillRef idx="3">
+            <a:schemeClr val="accent1"/>
+          </a:fillRef>
+          <a:effectRef idx="2">
+            <a:schemeClr val="accent1"/>
+          </a:effectRef>
+          <a:fontRef idx="minor">
+            <a:schemeClr val="lt1"/>
+          </a:fontRef>
+        </p:style>
+        <p:txBody>
+          <a:bodyPr rtlCol="0" anchor="ctr"/>
+          <a:lstStyle/>
+          <a:p>
+            <a:pPr algn="ctr"/>
+          </a:p>
+        </p:txBody>
+      </p:sp>
+      <p:sp>
+        <p:nvSpPr>
+          <p:cNvPr id="12" name="Rounded Rectangle 11"/>
+          <p:cNvSpPr/>
+          <p:nvPr/>
+        </p:nvSpPr>
+        <p:spPr>
+          <a:xfrm>
+            <a:off x="2670048" y="3401568"/>
+            <a:ext cx="6858000" cy="603504"/>
+          </a:xfrm>
+          <a:prstGeom prst="roundRect">
+            <a:avLst/>
+          </a:prstGeom>
+          <a:solidFill>
+            <a:srgbClr val="1E293B"/>
+          </a:solidFill>
+          <a:ln>
+            <a:noFill/>
+          </a:ln>
+          <a:effectLst/>
+        </p:spPr>
+        <p:style>
+          <a:lnRef idx="1">
+            <a:schemeClr val="accent1"/>
+          </a:lnRef>
+          <a:fillRef idx="3">
+            <a:schemeClr val="accent1"/>
+          </a:fillRef>
+          <a:effectRef idx="2">
+            <a:schemeClr val="accent1"/>
+          </a:effectRef>
+          <a:fontRef idx="minor">
+            <a:schemeClr val="lt1"/>
+          </a:fontRef>
+        </p:style>
+        <p:txBody>
+          <a:bodyPr rtlCol="0" anchor="ctr"/>
+          <a:lstStyle/>
+          <a:p>
+            <a:pPr algn="ctr"/>
+          </a:p>
+        </p:txBody>
+      </p:sp>
+      <p:sp>
+        <p:nvSpPr>
+          <p:cNvPr id="13" name="TextBox 12"/>
+          <p:cNvSpPr txBox="1"/>
+          <p:nvPr/>
+        </p:nvSpPr>
+        <p:spPr>
+          <a:xfrm>
+            <a:off x="2670048" y="3401568"/>
+            <a:ext cx="6858000" cy="603504"/>
+          </a:xfrm>
+          <a:prstGeom prst="rect">
+            <a:avLst/>
+          </a:prstGeom>
+          <a:noFill/>
+        </p:spPr>
+        <p:txBody>
+          <a:bodyPr wrap="square" anchor="ctr">
+            <a:spAutoFit/>
+          </a:bodyPr>
+          <a:lstStyle/>
+          <a:p>
+            <a:pPr algn="ctr">
+              <a:lnSpc>
+                <a:spcPct val="100000"/>
+              </a:lnSpc>
+              <a:spcAft>
+                <a:spcPts val="0"/>
+              </a:spcAft>
+            </a:pPr>
+            <a:r>
+              <a:rPr sz="1400" b="1">
+                <a:solidFill>
+                  <a:srgbClr val="E2E8F0"/>
+                </a:solidFill>
+                <a:latin typeface="Segoe UI"/>
+              </a:rPr>
+              <a:t>Moteur de recommandation — </a:t>
+            </a:r>
+            <a:r>
+              <a:rPr sz="1400" b="1">
+                <a:solidFill>
+                  <a:srgbClr val="94A3B8"/>
+                </a:solidFill>
+                <a:latin typeface="Segoe UI"/>
+              </a:rPr>
+              <a:t>collecte · ML : cosinus + profils k-means · score min-max pondéré</a:t>
+            </a:r>
+          </a:p>
+        </p:txBody>
+      </p:sp>
+      <p:sp>
+        <p:nvSpPr>
+          <p:cNvPr id="14" name="Down Arrow 13"/>
+          <p:cNvSpPr/>
+          <p:nvPr/>
+        </p:nvSpPr>
+        <p:spPr>
+          <a:xfrm>
+            <a:off x="5998464" y="4059936"/>
+            <a:ext cx="201168" cy="292608"/>
+          </a:xfrm>
+          <a:prstGeom prst="downArrow">
+            <a:avLst/>
+          </a:prstGeom>
+          <a:solidFill>
+            <a:srgbClr val="38BDF8"/>
+          </a:solidFill>
+          <a:ln>
+            <a:noFill/>
+          </a:ln>
+          <a:effectLst/>
+        </p:spPr>
+        <p:style>
+          <a:lnRef idx="1">
+            <a:schemeClr val="accent1"/>
+          </a:lnRef>
+          <a:fillRef idx="3">
+            <a:schemeClr val="accent1"/>
+          </a:fillRef>
+          <a:effectRef idx="2">
+            <a:schemeClr val="accent1"/>
+          </a:effectRef>
+          <a:fontRef idx="minor">
+            <a:schemeClr val="lt1"/>
+          </a:fontRef>
+        </p:style>
+        <p:txBody>
+          <a:bodyPr rtlCol="0" anchor="ctr"/>
+          <a:lstStyle/>
+          <a:p>
+            <a:pPr algn="ctr"/>
+          </a:p>
+        </p:txBody>
+      </p:sp>
+      <p:sp>
+        <p:nvSpPr>
+          <p:cNvPr id="15" name="Rounded Rectangle 14"/>
+          <p:cNvSpPr/>
+          <p:nvPr/>
+        </p:nvSpPr>
+        <p:spPr>
+          <a:xfrm>
+            <a:off x="777240" y="4443984"/>
+            <a:ext cx="1700784" cy="841248"/>
+          </a:xfrm>
+          <a:prstGeom prst="roundRect">
+            <a:avLst/>
+          </a:prstGeom>
+          <a:solidFill>
+            <a:srgbClr val="1E293B"/>
+          </a:solidFill>
+          <a:ln>
+            <a:noFill/>
+          </a:ln>
+          <a:effectLst/>
+        </p:spPr>
+        <p:style>
+          <a:lnRef idx="1">
+            <a:schemeClr val="accent1"/>
+          </a:lnRef>
+          <a:fillRef idx="3">
+            <a:schemeClr val="accent1"/>
+          </a:fillRef>
+          <a:effectRef idx="2">
+            <a:schemeClr val="accent1"/>
+          </a:effectRef>
+          <a:fontRef idx="minor">
+            <a:schemeClr val="lt1"/>
+          </a:fontRef>
+        </p:style>
+        <p:txBody>
+          <a:bodyPr rtlCol="0" anchor="ctr"/>
+          <a:lstStyle/>
+          <a:p>
+            <a:pPr algn="ctr"/>
+          </a:p>
+        </p:txBody>
+      </p:sp>
+      <p:sp>
+        <p:nvSpPr>
+          <p:cNvPr id="16" name="TextBox 15"/>
+          <p:cNvSpPr txBox="1"/>
+          <p:nvPr/>
+        </p:nvSpPr>
+        <p:spPr>
+          <a:xfrm>
+            <a:off x="777240" y="4443984"/>
+            <a:ext cx="1700784" cy="841248"/>
+          </a:xfrm>
+          <a:prstGeom prst="rect">
+            <a:avLst/>
+          </a:prstGeom>
+          <a:noFill/>
+        </p:spPr>
+        <p:txBody>
+          <a:bodyPr wrap="square" anchor="ctr">
+            <a:spAutoFit/>
+          </a:bodyPr>
+          <a:lstStyle/>
+          <a:p>
+            <a:pPr algn="ctr">
+              <a:lnSpc>
+                <a:spcPct val="100000"/>
+              </a:lnSpc>
+              <a:spcAft>
+                <a:spcPts val="0"/>
+              </a:spcAft>
+            </a:pPr>
+            <a:r>
+              <a:rPr sz="1250" b="1">
+                <a:solidFill>
+                  <a:srgbClr val="E2E8F0"/>
+                </a:solidFill>
+                <a:latin typeface="Segoe UI"/>
+              </a:rPr>
+              <a:t>API SNCF</a:t>
+            </a:r>
+          </a:p>
+          <a:p>
+            <a:pPr algn="ctr">
+              <a:lnSpc>
+                <a:spcPct val="100000"/>
+              </a:lnSpc>
+              <a:spcAft>
+                <a:spcPts val="0"/>
+              </a:spcAft>
+            </a:pPr>
+            <a:r>
+              <a:rPr sz="1100" b="1">
+                <a:solidFill>
+                  <a:srgbClr val="94A3B8"/>
+                </a:solidFill>
+                <a:latin typeface="Segoe UI"/>
+              </a:rPr>
+              <a:t>/places · /journeys</a:t>
+            </a:r>
+          </a:p>
+        </p:txBody>
+      </p:sp>
+      <p:sp>
+        <p:nvSpPr>
+          <p:cNvPr id="17" name="Rounded Rectangle 16"/>
+          <p:cNvSpPr/>
+          <p:nvPr/>
+        </p:nvSpPr>
+        <p:spPr>
+          <a:xfrm>
+            <a:off x="2562148" y="4443984"/>
+            <a:ext cx="1700784" cy="841248"/>
+          </a:xfrm>
+          <a:prstGeom prst="roundRect">
+            <a:avLst/>
+          </a:prstGeom>
+          <a:solidFill>
+            <a:srgbClr val="1E293B"/>
+          </a:solidFill>
+          <a:ln>
+            <a:noFill/>
+          </a:ln>
+          <a:effectLst/>
+        </p:spPr>
+        <p:style>
+          <a:lnRef idx="1">
+            <a:schemeClr val="accent1"/>
+          </a:lnRef>
+          <a:fillRef idx="3">
+            <a:schemeClr val="accent1"/>
+          </a:fillRef>
+          <a:effectRef idx="2">
+            <a:schemeClr val="accent1"/>
+          </a:effectRef>
+          <a:fontRef idx="minor">
+            <a:schemeClr val="lt1"/>
+          </a:fontRef>
+        </p:style>
+        <p:txBody>
+          <a:bodyPr rtlCol="0" anchor="ctr"/>
+          <a:lstStyle/>
+          <a:p>
+            <a:pPr algn="ctr"/>
+          </a:p>
+        </p:txBody>
+      </p:sp>
+      <p:sp>
+        <p:nvSpPr>
+          <p:cNvPr id="18" name="TextBox 17"/>
+          <p:cNvSpPr txBox="1"/>
+          <p:nvPr/>
+        </p:nvSpPr>
+        <p:spPr>
+          <a:xfrm>
+            <a:off x="2562148" y="4443984"/>
+            <a:ext cx="1700784" cy="841248"/>
+          </a:xfrm>
+          <a:prstGeom prst="rect">
+            <a:avLst/>
+          </a:prstGeom>
+          <a:noFill/>
+        </p:spPr>
+        <p:txBody>
+          <a:bodyPr wrap="square" anchor="ctr">
+            <a:spAutoFit/>
+          </a:bodyPr>
+          <a:lstStyle/>
+          <a:p>
+            <a:pPr algn="ctr">
+              <a:lnSpc>
+                <a:spcPct val="100000"/>
+              </a:lnSpc>
+              <a:spcAft>
+                <a:spcPts val="0"/>
+              </a:spcAft>
+            </a:pPr>
+            <a:r>
+              <a:rPr sz="1250" b="1">
+                <a:solidFill>
+                  <a:srgbClr val="E2E8F0"/>
+                </a:solidFill>
+                <a:latin typeface="Segoe UI"/>
+              </a:rPr>
+              <a:t>Open-Meteo</a:t>
+            </a:r>
+          </a:p>
+          <a:p>
+            <a:pPr algn="ctr">
+              <a:lnSpc>
+                <a:spcPct val="100000"/>
+              </a:lnSpc>
+              <a:spcAft>
+                <a:spcPts val="0"/>
+              </a:spcAft>
+            </a:pPr>
+            <a:r>
+              <a:rPr sz="1100" b="1">
+                <a:solidFill>
+                  <a:srgbClr val="94A3B8"/>
+                </a:solidFill>
+                <a:latin typeface="Segoe UI"/>
+              </a:rPr>
+              <a:t>météo</a:t>
+            </a:r>
+          </a:p>
+        </p:txBody>
+      </p:sp>
+      <p:sp>
+        <p:nvSpPr>
+          <p:cNvPr id="19" name="Rounded Rectangle 18"/>
+          <p:cNvSpPr/>
+          <p:nvPr/>
+        </p:nvSpPr>
+        <p:spPr>
+          <a:xfrm>
+            <a:off x="4347056" y="4443984"/>
+            <a:ext cx="1700784" cy="841248"/>
+          </a:xfrm>
+          <a:prstGeom prst="roundRect">
+            <a:avLst/>
+          </a:prstGeom>
+          <a:solidFill>
+            <a:srgbClr val="1E293B"/>
+          </a:solidFill>
+          <a:ln>
+            <a:noFill/>
+          </a:ln>
+          <a:effectLst/>
+        </p:spPr>
+        <p:style>
+          <a:lnRef idx="1">
+            <a:schemeClr val="accent1"/>
+          </a:lnRef>
+          <a:fillRef idx="3">
+            <a:schemeClr val="accent1"/>
+          </a:fillRef>
+          <a:effectRef idx="2">
+            <a:schemeClr val="accent1"/>
+          </a:effectRef>
+          <a:fontRef idx="minor">
+            <a:schemeClr val="lt1"/>
+          </a:fontRef>
+        </p:style>
+        <p:txBody>
+          <a:bodyPr rtlCol="0" anchor="ctr"/>
+          <a:lstStyle/>
+          <a:p>
+            <a:pPr algn="ctr"/>
+          </a:p>
+        </p:txBody>
+      </p:sp>
+      <p:sp>
+        <p:nvSpPr>
+          <p:cNvPr id="20" name="TextBox 19"/>
+          <p:cNvSpPr txBox="1"/>
+          <p:nvPr/>
+        </p:nvSpPr>
+        <p:spPr>
+          <a:xfrm>
+            <a:off x="4347056" y="4443984"/>
+            <a:ext cx="1700784" cy="841248"/>
+          </a:xfrm>
+          <a:prstGeom prst="rect">
+            <a:avLst/>
+          </a:prstGeom>
+          <a:noFill/>
+        </p:spPr>
+        <p:txBody>
+          <a:bodyPr wrap="square" anchor="ctr">
+            <a:spAutoFit/>
+          </a:bodyPr>
+          <a:lstStyle/>
+          <a:p>
+            <a:pPr algn="ctr">
+              <a:lnSpc>
+                <a:spcPct val="100000"/>
+              </a:lnSpc>
+              <a:spcAft>
+                <a:spcPts val="0"/>
+              </a:spcAft>
+            </a:pPr>
+            <a:r>
+              <a:rPr sz="1250" b="1">
+                <a:solidFill>
+                  <a:srgbClr val="E2E8F0"/>
+                </a:solidFill>
+                <a:latin typeface="Segoe UI"/>
+              </a:rPr>
+              <a:t>DATAtourisme</a:t>
+            </a:r>
+          </a:p>
+          <a:p>
+            <a:pPr algn="ctr">
+              <a:lnSpc>
+                <a:spcPct val="100000"/>
+              </a:lnSpc>
+              <a:spcAft>
+                <a:spcPts val="0"/>
+              </a:spcAft>
+            </a:pPr>
+            <a:r>
+              <a:rPr sz="1100" b="1">
+                <a:solidFill>
+                  <a:srgbClr val="94A3B8"/>
+                </a:solidFill>
+                <a:latin typeface="Segoe UI"/>
+              </a:rPr>
+              <a:t>(repli OSM)</a:t>
+            </a:r>
+          </a:p>
+        </p:txBody>
+      </p:sp>
+      <p:sp>
+        <p:nvSpPr>
+          <p:cNvPr id="21" name="Rounded Rectangle 20"/>
+          <p:cNvSpPr/>
+          <p:nvPr/>
+        </p:nvSpPr>
+        <p:spPr>
+          <a:xfrm>
+            <a:off x="6131964" y="4443984"/>
+            <a:ext cx="1700784" cy="841248"/>
+          </a:xfrm>
+          <a:prstGeom prst="roundRect">
+            <a:avLst/>
+          </a:prstGeom>
+          <a:solidFill>
+            <a:srgbClr val="1E293B"/>
+          </a:solidFill>
+          <a:ln>
+            <a:noFill/>
+          </a:ln>
+          <a:effectLst/>
+        </p:spPr>
+        <p:style>
+          <a:lnRef idx="1">
+            <a:schemeClr val="accent1"/>
+          </a:lnRef>
+          <a:fillRef idx="3">
+            <a:schemeClr val="accent1"/>
+          </a:fillRef>
+          <a:effectRef idx="2">
+            <a:schemeClr val="accent1"/>
+          </a:effectRef>
+          <a:fontRef idx="minor">
+            <a:schemeClr val="lt1"/>
+          </a:fontRef>
+        </p:style>
+        <p:txBody>
+          <a:bodyPr rtlCol="0" anchor="ctr"/>
+          <a:lstStyle/>
+          <a:p>
+            <a:pPr algn="ctr"/>
+          </a:p>
+        </p:txBody>
+      </p:sp>
+      <p:sp>
+        <p:nvSpPr>
+          <p:cNvPr id="22" name="TextBox 21"/>
+          <p:cNvSpPr txBox="1"/>
+          <p:nvPr/>
+        </p:nvSpPr>
+        <p:spPr>
+          <a:xfrm>
+            <a:off x="6131964" y="4443984"/>
+            <a:ext cx="1700784" cy="841248"/>
+          </a:xfrm>
+          <a:prstGeom prst="rect">
+            <a:avLst/>
+          </a:prstGeom>
+          <a:noFill/>
+        </p:spPr>
+        <p:txBody>
+          <a:bodyPr wrap="square" anchor="ctr">
+            <a:spAutoFit/>
+          </a:bodyPr>
+          <a:lstStyle/>
+          <a:p>
+            <a:pPr algn="ctr">
+              <a:lnSpc>
+                <a:spcPct val="100000"/>
+              </a:lnSpc>
+              <a:spcAft>
+                <a:spcPts val="0"/>
+              </a:spcAft>
+            </a:pPr>
+            <a:r>
+              <a:rPr sz="1250" b="1">
+                <a:solidFill>
+                  <a:srgbClr val="E2E8F0"/>
+                </a:solidFill>
+                <a:latin typeface="Segoe UI"/>
+              </a:rPr>
+              <a:t>OpenAgenda</a:t>
+            </a:r>
+          </a:p>
+          <a:p>
+            <a:pPr algn="ctr">
+              <a:lnSpc>
+                <a:spcPct val="100000"/>
+              </a:lnSpc>
+              <a:spcAft>
+                <a:spcPts val="0"/>
+              </a:spcAft>
+            </a:pPr>
+            <a:r>
+              <a:rPr sz="1100" b="1">
+                <a:solidFill>
+                  <a:srgbClr val="94A3B8"/>
+                </a:solidFill>
+                <a:latin typeface="Segoe UI"/>
+              </a:rPr>
+              <a:t>événements</a:t>
+            </a:r>
+          </a:p>
+        </p:txBody>
+      </p:sp>
+      <p:sp>
+        <p:nvSpPr>
+          <p:cNvPr id="23" name="Rounded Rectangle 22"/>
+          <p:cNvSpPr/>
+          <p:nvPr/>
+        </p:nvSpPr>
+        <p:spPr>
+          <a:xfrm>
+            <a:off x="7916872" y="4443984"/>
+            <a:ext cx="1700784" cy="841248"/>
+          </a:xfrm>
+          <a:prstGeom prst="roundRect">
+            <a:avLst/>
+          </a:prstGeom>
+          <a:solidFill>
+            <a:srgbClr val="1E293B"/>
+          </a:solidFill>
+          <a:ln>
+            <a:noFill/>
+          </a:ln>
+          <a:effectLst/>
+        </p:spPr>
+        <p:style>
+          <a:lnRef idx="1">
+            <a:schemeClr val="accent1"/>
+          </a:lnRef>
+          <a:fillRef idx="3">
+            <a:schemeClr val="accent1"/>
+          </a:fillRef>
+          <a:effectRef idx="2">
+            <a:schemeClr val="accent1"/>
+          </a:effectRef>
+          <a:fontRef idx="minor">
+            <a:schemeClr val="lt1"/>
+          </a:fontRef>
+        </p:style>
+        <p:txBody>
+          <a:bodyPr rtlCol="0" anchor="ctr"/>
+          <a:lstStyle/>
+          <a:p>
+            <a:pPr algn="ctr"/>
+          </a:p>
+        </p:txBody>
+      </p:sp>
+      <p:sp>
+        <p:nvSpPr>
+          <p:cNvPr id="24" name="TextBox 23"/>
+          <p:cNvSpPr txBox="1"/>
+          <p:nvPr/>
+        </p:nvSpPr>
+        <p:spPr>
+          <a:xfrm>
+            <a:off x="7916872" y="4443984"/>
+            <a:ext cx="1700784" cy="841248"/>
+          </a:xfrm>
+          <a:prstGeom prst="rect">
+            <a:avLst/>
+          </a:prstGeom>
+          <a:noFill/>
+        </p:spPr>
+        <p:txBody>
+          <a:bodyPr wrap="square" anchor="ctr">
+            <a:spAutoFit/>
+          </a:bodyPr>
+          <a:lstStyle/>
+          <a:p>
+            <a:pPr algn="ctr">
+              <a:lnSpc>
+                <a:spcPct val="100000"/>
+              </a:lnSpc>
+              <a:spcAft>
+                <a:spcPts val="0"/>
+              </a:spcAft>
+            </a:pPr>
+            <a:r>
+              <a:rPr sz="1250" b="1">
+                <a:solidFill>
+                  <a:srgbClr val="E2E8F0"/>
+                </a:solidFill>
+                <a:latin typeface="Segoe UI"/>
+              </a:rPr>
+              <a:t>ADEME</a:t>
+            </a:r>
+          </a:p>
+          <a:p>
+            <a:pPr algn="ctr">
+              <a:lnSpc>
+                <a:spcPct val="100000"/>
+              </a:lnSpc>
+              <a:spcAft>
+                <a:spcPts val="0"/>
+              </a:spcAft>
+            </a:pPr>
+            <a:r>
+              <a:rPr sz="1100" b="1">
+                <a:solidFill>
+                  <a:srgbClr val="94A3B8"/>
+                </a:solidFill>
+                <a:latin typeface="Segoe UI"/>
+              </a:rPr>
+              <a:t>CO₂ voiture</a:t>
+            </a:r>
+          </a:p>
+        </p:txBody>
+      </p:sp>
+      <p:sp>
+        <p:nvSpPr>
+          <p:cNvPr id="25" name="Rounded Rectangle 24"/>
+          <p:cNvSpPr/>
+          <p:nvPr/>
+        </p:nvSpPr>
+        <p:spPr>
+          <a:xfrm>
+            <a:off x="9701780" y="4443984"/>
+            <a:ext cx="1700784" cy="841248"/>
+          </a:xfrm>
+          <a:prstGeom prst="roundRect">
+            <a:avLst/>
+          </a:prstGeom>
+          <a:solidFill>
+            <a:srgbClr val="1E293B"/>
+          </a:solidFill>
+          <a:ln>
+            <a:noFill/>
+          </a:ln>
+          <a:effectLst/>
+        </p:spPr>
+        <p:style>
+          <a:lnRef idx="1">
+            <a:schemeClr val="accent1"/>
+          </a:lnRef>
+          <a:fillRef idx="3">
+            <a:schemeClr val="accent1"/>
+          </a:fillRef>
+          <a:effectRef idx="2">
+            <a:schemeClr val="accent1"/>
+          </a:effectRef>
+          <a:fontRef idx="minor">
+            <a:schemeClr val="lt1"/>
+          </a:fontRef>
+        </p:style>
+        <p:txBody>
+          <a:bodyPr rtlCol="0" anchor="ctr"/>
+          <a:lstStyle/>
+          <a:p>
+            <a:pPr algn="ctr"/>
+          </a:p>
+        </p:txBody>
+      </p:sp>
+      <p:sp>
+        <p:nvSpPr>
+          <p:cNvPr id="26" name="TextBox 25"/>
+          <p:cNvSpPr txBox="1"/>
+          <p:nvPr/>
+        </p:nvSpPr>
+        <p:spPr>
+          <a:xfrm>
+            <a:off x="9701780" y="4443984"/>
+            <a:ext cx="1700784" cy="841248"/>
+          </a:xfrm>
+          <a:prstGeom prst="rect">
+            <a:avLst/>
+          </a:prstGeom>
+          <a:noFill/>
+        </p:spPr>
+        <p:txBody>
+          <a:bodyPr wrap="square" anchor="ctr">
+            <a:spAutoFit/>
+          </a:bodyPr>
+          <a:lstStyle/>
+          <a:p>
+            <a:pPr algn="ctr">
+              <a:lnSpc>
+                <a:spcPct val="100000"/>
+              </a:lnSpc>
+              <a:spcAft>
+                <a:spcPts val="0"/>
+              </a:spcAft>
+            </a:pPr>
+            <a:r>
+              <a:rPr sz="1250" b="1">
+                <a:solidFill>
+                  <a:srgbClr val="E2E8F0"/>
+                </a:solidFill>
+                <a:latin typeface="Segoe UI"/>
+              </a:rPr>
+              <a:t>frequentation-</a:t>
+            </a:r>
+          </a:p>
+          <a:p>
+            <a:pPr algn="ctr">
+              <a:lnSpc>
+                <a:spcPct val="100000"/>
+              </a:lnSpc>
+              <a:spcAft>
+                <a:spcPts val="0"/>
+              </a:spcAft>
+            </a:pPr>
+            <a:r>
+              <a:rPr sz="1100" b="1">
+                <a:solidFill>
+                  <a:srgbClr val="94A3B8"/>
+                </a:solidFill>
+                <a:latin typeface="Segoe UI"/>
+              </a:rPr>
+              <a:t>gares</a:t>
+            </a:r>
+          </a:p>
+        </p:txBody>
+      </p:sp>
+      <p:sp>
+        <p:nvSpPr>
+          <p:cNvPr id="27" name="Rounded Rectangle 26"/>
+          <p:cNvSpPr/>
+          <p:nvPr/>
+        </p:nvSpPr>
+        <p:spPr>
+          <a:xfrm>
+            <a:off x="777240" y="5596128"/>
+            <a:ext cx="10607040" cy="859536"/>
+          </a:xfrm>
+          <a:prstGeom prst="roundRect">
+            <a:avLst/>
+          </a:prstGeom>
+          <a:solidFill>
+            <a:srgbClr val="1E293B"/>
+          </a:solidFill>
+          <a:ln w="15240">
             <a:solidFill>
-              <a:srgbClr val="334155"/>
+              <a:srgbClr val="22C55E"/>
             </a:solidFill>
           </a:ln>
-        </p:spPr>
-      </p:pic>
-      <p:sp>
-        <p:nvSpPr>
-          <p:cNvPr id="7" name="TextBox 6"/>
+          <a:effectLst/>
+        </p:spPr>
+        <p:style>
+          <a:lnRef idx="1">
+            <a:schemeClr val="accent1"/>
+          </a:lnRef>
+          <a:fillRef idx="3">
+            <a:schemeClr val="accent1"/>
+          </a:fillRef>
+          <a:effectRef idx="2">
+            <a:schemeClr val="accent1"/>
+          </a:effectRef>
+          <a:fontRef idx="minor">
+            <a:schemeClr val="lt1"/>
+          </a:fontRef>
+        </p:style>
+        <p:txBody>
+          <a:bodyPr rtlCol="0" anchor="ctr"/>
+          <a:lstStyle/>
+          <a:p>
+            <a:pPr algn="ctr"/>
+          </a:p>
+        </p:txBody>
+      </p:sp>
+      <p:sp>
+        <p:nvSpPr>
+          <p:cNvPr id="28" name="TextBox 27"/>
           <p:cNvSpPr txBox="1"/>
           <p:nvPr/>
         </p:nvSpPr>
         <p:spPr>
           <a:xfrm>
-            <a:off x="777240" y="6419088"/>
-            <a:ext cx="10607040" cy="365760"/>
+            <a:off x="1051560" y="5669280"/>
+            <a:ext cx="10149840" cy="731520"/>
           </a:xfrm>
           <a:prstGeom prst="rect">
             <a:avLst/>
@@ -7620,12 +8693,12 @@
           <a:noFill/>
         </p:spPr>
         <p:txBody>
-          <a:bodyPr wrap="square">
+          <a:bodyPr wrap="square" anchor="ctr">
             <a:spAutoFit/>
           </a:bodyPr>
           <a:lstStyle/>
           <a:p>
-            <a:pPr algn="ctr">
+            <a:pPr algn="l">
               <a:lnSpc>
                 <a:spcPct val="100000"/>
               </a:lnSpc>
@@ -7634,22 +8707,40 @@
               </a:spcAft>
             </a:pPr>
             <a:r>
+              <a:rPr sz="1500" b="1">
+                <a:solidFill>
+                  <a:srgbClr val="22C55E"/>
+                </a:solidFill>
+                <a:latin typeface="Segoe UI"/>
+              </a:rPr>
+              <a:t>🛟 Mode dégradé : </a:t>
+            </a:r>
+            <a:r>
+              <a:rPr sz="1400" b="0">
+                <a:solidFill>
+                  <a:srgbClr val="94A3B8"/>
+                </a:solidFill>
+                <a:latin typeface="Segoe UI"/>
+              </a:rPr>
+              <a:t>chaque appel passe par cache/*.json — si l'API échoue ou </a:t>
+            </a:r>
+            <a:r>
               <a:rPr sz="1300" b="0">
                 <a:solidFill>
-                  <a:srgbClr val="22C55E"/>
+                  <a:srgbClr val="E2E8F0"/>
                 </a:solidFill>
                 <a:latin typeface="Consolas"/>
               </a:rPr>
-              <a:t>python src/escapade/recommender.py --html</a:t>
-            </a:r>
-            <a:r>
-              <a:rPr sz="1300" b="0">
+              <a:t>RECO_CACHE_FIRST=1</a:t>
+            </a:r>
+            <a:r>
+              <a:rPr sz="1400" b="0">
                 <a:solidFill>
                   <a:srgbClr val="94A3B8"/>
                 </a:solidFill>
                 <a:latin typeface="Segoe UI"/>
               </a:rPr>
-              <a:t>   →  escapade_report.html, envoyable à un ami</a:t>
+              <a:t>, on sert le cache : la démo tourne hors-ligne</a:t>
             </a:r>
           </a:p>
         </p:txBody>
@@ -7761,7 +8852,7 @@
                 </a:solidFill>
                 <a:latin typeface="Segoe UI"/>
               </a:rPr>
-              <a:t>Architecture</a:t>
+              <a:t>7 sources de données croisées</a:t>
             </a:r>
           </a:p>
         </p:txBody>
@@ -7803,7 +8894,7 @@
                 </a:solidFill>
                 <a:latin typeface="Segoe UI"/>
               </a:rPr>
-              <a:t>Un connecteur par source · tout passe par un cache JSON avec repli automatique</a:t>
+              <a:t>Open data + APIs temps réel — aucune feature ne dépend uniquement de l'API</a:t>
             </a:r>
           </a:p>
         </p:txBody>
@@ -7858,138 +8949,8 @@
         </p:nvSpPr>
         <p:spPr>
           <a:xfrm>
-            <a:off x="4498848" y="1481328"/>
-            <a:ext cx="3200400" cy="530352"/>
-          </a:xfrm>
-          <a:prstGeom prst="roundRect">
-            <a:avLst/>
-          </a:prstGeom>
-          <a:solidFill>
-            <a:srgbClr val="334155"/>
-          </a:solidFill>
-          <a:ln>
-            <a:noFill/>
-          </a:ln>
-          <a:effectLst/>
-        </p:spPr>
-        <p:style>
-          <a:lnRef idx="1">
-            <a:schemeClr val="accent1"/>
-          </a:lnRef>
-          <a:fillRef idx="3">
-            <a:schemeClr val="accent1"/>
-          </a:fillRef>
-          <a:effectRef idx="2">
-            <a:schemeClr val="accent1"/>
-          </a:effectRef>
-          <a:fontRef idx="minor">
-            <a:schemeClr val="lt1"/>
-          </a:fontRef>
-        </p:style>
-        <p:txBody>
-          <a:bodyPr rtlCol="0" anchor="ctr"/>
-          <a:lstStyle/>
-          <a:p>
-            <a:pPr algn="ctr"/>
-          </a:p>
-        </p:txBody>
-      </p:sp>
-      <p:sp>
-        <p:nvSpPr>
-          <p:cNvPr id="7" name="TextBox 6"/>
-          <p:cNvSpPr txBox="1"/>
-          <p:nvPr/>
-        </p:nvSpPr>
-        <p:spPr>
-          <a:xfrm>
-            <a:off x="4498848" y="1481328"/>
-            <a:ext cx="3200400" cy="530352"/>
-          </a:xfrm>
-          <a:prstGeom prst="rect">
-            <a:avLst/>
-          </a:prstGeom>
-          <a:noFill/>
-        </p:spPr>
-        <p:txBody>
-          <a:bodyPr wrap="square" anchor="ctr">
-            <a:spAutoFit/>
-          </a:bodyPr>
-          <a:lstStyle/>
-          <a:p>
-            <a:pPr algn="ctr">
-              <a:lnSpc>
-                <a:spcPct val="100000"/>
-              </a:lnSpc>
-              <a:spcAft>
-                <a:spcPts val="0"/>
-              </a:spcAft>
-            </a:pPr>
-            <a:r>
-              <a:rPr sz="1500" b="1">
-                <a:solidFill>
-                  <a:srgbClr val="E2E8F0"/>
-                </a:solidFill>
-                <a:latin typeface="Segoe UI"/>
-              </a:rPr>
-              <a:t>👤  Utilisateur</a:t>
-            </a:r>
-          </a:p>
-        </p:txBody>
-      </p:sp>
-      <p:sp>
-        <p:nvSpPr>
-          <p:cNvPr id="8" name="Down Arrow 7"/>
-          <p:cNvSpPr/>
-          <p:nvPr/>
-        </p:nvSpPr>
-        <p:spPr>
-          <a:xfrm>
-            <a:off x="5998464" y="2084831"/>
-            <a:ext cx="201168" cy="292608"/>
-          </a:xfrm>
-          <a:prstGeom prst="downArrow">
-            <a:avLst/>
-          </a:prstGeom>
-          <a:solidFill>
-            <a:srgbClr val="38BDF8"/>
-          </a:solidFill>
-          <a:ln>
-            <a:noFill/>
-          </a:ln>
-          <a:effectLst/>
-        </p:spPr>
-        <p:style>
-          <a:lnRef idx="1">
-            <a:schemeClr val="accent1"/>
-          </a:lnRef>
-          <a:fillRef idx="3">
-            <a:schemeClr val="accent1"/>
-          </a:fillRef>
-          <a:effectRef idx="2">
-            <a:schemeClr val="accent1"/>
-          </a:effectRef>
-          <a:fontRef idx="minor">
-            <a:schemeClr val="lt1"/>
-          </a:fontRef>
-        </p:style>
-        <p:txBody>
-          <a:bodyPr rtlCol="0" anchor="ctr"/>
-          <a:lstStyle/>
-          <a:p>
-            <a:pPr algn="ctr"/>
-          </a:p>
-        </p:txBody>
-      </p:sp>
-      <p:sp>
-        <p:nvSpPr>
-          <p:cNvPr id="9" name="Rounded Rectangle 8"/>
-          <p:cNvSpPr/>
-          <p:nvPr/>
-        </p:nvSpPr>
-        <p:spPr>
-          <a:xfrm>
-            <a:off x="2670048" y="2432304"/>
-            <a:ext cx="6858000" cy="566928"/>
+            <a:off x="777240" y="1664208"/>
+            <a:ext cx="10607040" cy="566928"/>
           </a:xfrm>
           <a:prstGeom prst="roundRect">
             <a:avLst/>
@@ -8026,14 +8987,14 @@
       </p:sp>
       <p:sp>
         <p:nvSpPr>
-          <p:cNvPr id="10" name="TextBox 9"/>
+          <p:cNvPr id="7" name="TextBox 6"/>
           <p:cNvSpPr txBox="1"/>
           <p:nvPr/>
         </p:nvSpPr>
         <p:spPr>
           <a:xfrm>
-            <a:off x="2670048" y="2432304"/>
-            <a:ext cx="6858000" cy="566928"/>
+            <a:off x="1051560" y="1746504"/>
+            <a:ext cx="4663440" cy="411480"/>
           </a:xfrm>
           <a:prstGeom prst="rect">
             <a:avLst/>
@@ -8041,74 +9002,89 @@
           <a:noFill/>
         </p:spPr>
         <p:txBody>
-          <a:bodyPr wrap="square" anchor="ctr">
+          <a:bodyPr wrap="square">
             <a:spAutoFit/>
           </a:bodyPr>
           <a:lstStyle/>
           <a:p>
-            <a:pPr algn="ctr">
-              <a:lnSpc>
-                <a:spcPct val="100000"/>
-              </a:lnSpc>
-              <a:spcAft>
-                <a:spcPts val="0"/>
+            <a:pPr algn="l">
+              <a:lnSpc>
+                <a:spcPct val="100000"/>
+              </a:lnSpc>
+              <a:spcAft>
+                <a:spcPts val="800"/>
               </a:spcAft>
             </a:pPr>
             <a:r>
               <a:rPr sz="1400" b="1">
                 <a:solidFill>
-                  <a:srgbClr val="38BDF8"/>
-                </a:solidFill>
-                <a:latin typeface="Consolas"/>
-              </a:rPr>
-              <a:t>app.py</a:t>
-            </a:r>
-            <a:r>
-              <a:rPr sz="1400" b="1">
-                <a:solidFill>
                   <a:srgbClr val="E2E8F0"/>
                 </a:solidFill>
                 <a:latin typeface="Segoe UI"/>
               </a:rPr>
-              <a:t> (Streamlit)   ·   </a:t>
-            </a:r>
-            <a:r>
-              <a:rPr sz="1400" b="1">
-                <a:solidFill>
-                  <a:srgbClr val="38BDF8"/>
-                </a:solidFill>
-                <a:latin typeface="Consolas"/>
-              </a:rPr>
-              <a:t>recommender.py</a:t>
-            </a:r>
-            <a:r>
-              <a:rPr sz="1400" b="1">
-                <a:solidFill>
-                  <a:srgbClr val="E2E8F0"/>
-                </a:solidFill>
-                <a:latin typeface="Segoe UI"/>
-              </a:rPr>
-              <a:t> (CLI + rapport HTML)</a:t>
-            </a:r>
-          </a:p>
-        </p:txBody>
-      </p:sp>
-      <p:sp>
-        <p:nvSpPr>
-          <p:cNvPr id="11" name="Down Arrow 10"/>
+              <a:t>API SNCF /places · /journeys</a:t>
+            </a:r>
+          </a:p>
+        </p:txBody>
+      </p:sp>
+      <p:sp>
+        <p:nvSpPr>
+          <p:cNvPr id="8" name="TextBox 7"/>
+          <p:cNvSpPr txBox="1"/>
+          <p:nvPr/>
+        </p:nvSpPr>
+        <p:spPr>
+          <a:xfrm>
+            <a:off x="5760720" y="1746504"/>
+            <a:ext cx="4206240" cy="411480"/>
+          </a:xfrm>
+          <a:prstGeom prst="rect">
+            <a:avLst/>
+          </a:prstGeom>
+          <a:noFill/>
+        </p:spPr>
+        <p:txBody>
+          <a:bodyPr wrap="square">
+            <a:spAutoFit/>
+          </a:bodyPr>
+          <a:lstStyle/>
+          <a:p>
+            <a:pPr algn="l">
+              <a:lnSpc>
+                <a:spcPct val="100000"/>
+              </a:lnSpc>
+              <a:spcAft>
+                <a:spcPts val="800"/>
+              </a:spcAft>
+            </a:pPr>
+            <a:r>
+              <a:rPr sz="1300" b="0">
+                <a:solidFill>
+                  <a:srgbClr val="94A3B8"/>
+                </a:solidFill>
+                <a:latin typeface="Segoe UI"/>
+              </a:rPr>
+              <a:t>résolution des gares, durée du trajet, CO₂ train</a:t>
+            </a:r>
+          </a:p>
+        </p:txBody>
+      </p:sp>
+      <p:sp>
+        <p:nvSpPr>
+          <p:cNvPr id="9" name="Rounded Rectangle 8"/>
           <p:cNvSpPr/>
           <p:nvPr/>
         </p:nvSpPr>
         <p:spPr>
           <a:xfrm>
-            <a:off x="5998464" y="3054096"/>
-            <a:ext cx="201168" cy="292608"/>
-          </a:xfrm>
-          <a:prstGeom prst="downArrow">
+            <a:off x="10104120" y="1755648"/>
+            <a:ext cx="1097280" cy="384048"/>
+          </a:xfrm>
+          <a:prstGeom prst="roundRect">
             <a:avLst/>
           </a:prstGeom>
           <a:solidFill>
-            <a:srgbClr val="38BDF8"/>
+            <a:srgbClr val="0F172A"/>
           </a:solidFill>
           <a:ln>
             <a:noFill/>
@@ -8139,14 +9115,56 @@
       </p:sp>
       <p:sp>
         <p:nvSpPr>
-          <p:cNvPr id="12" name="Rounded Rectangle 11"/>
+          <p:cNvPr id="10" name="TextBox 9"/>
+          <p:cNvSpPr txBox="1"/>
+          <p:nvPr/>
+        </p:nvSpPr>
+        <p:spPr>
+          <a:xfrm>
+            <a:off x="10104120" y="1755648"/>
+            <a:ext cx="1097280" cy="384048"/>
+          </a:xfrm>
+          <a:prstGeom prst="rect">
+            <a:avLst/>
+          </a:prstGeom>
+          <a:noFill/>
+        </p:spPr>
+        <p:txBody>
+          <a:bodyPr wrap="square" anchor="ctr">
+            <a:spAutoFit/>
+          </a:bodyPr>
+          <a:lstStyle/>
+          <a:p>
+            <a:pPr algn="ctr">
+              <a:lnSpc>
+                <a:spcPct val="100000"/>
+              </a:lnSpc>
+              <a:spcAft>
+                <a:spcPts val="0"/>
+              </a:spcAft>
+            </a:pPr>
+            <a:r>
+              <a:rPr sz="1100" b="1">
+                <a:solidFill>
+                  <a:srgbClr val="38BDF8"/>
+                </a:solidFill>
+                <a:latin typeface="Segoe UI"/>
+              </a:rPr>
+              <a:t>central</a:t>
+            </a:r>
+          </a:p>
+        </p:txBody>
+      </p:sp>
+      <p:sp>
+        <p:nvSpPr>
+          <p:cNvPr id="11" name="Rounded Rectangle 10"/>
           <p:cNvSpPr/>
           <p:nvPr/>
         </p:nvSpPr>
         <p:spPr>
           <a:xfrm>
-            <a:off x="2670048" y="3401568"/>
-            <a:ext cx="6858000" cy="603504"/>
+            <a:off x="777240" y="2331720"/>
+            <a:ext cx="10607040" cy="566928"/>
           </a:xfrm>
           <a:prstGeom prst="roundRect">
             <a:avLst/>
@@ -8183,14 +9201,56 @@
       </p:sp>
       <p:sp>
         <p:nvSpPr>
+          <p:cNvPr id="12" name="TextBox 11"/>
+          <p:cNvSpPr txBox="1"/>
+          <p:nvPr/>
+        </p:nvSpPr>
+        <p:spPr>
+          <a:xfrm>
+            <a:off x="1051560" y="2414016"/>
+            <a:ext cx="4663440" cy="411480"/>
+          </a:xfrm>
+          <a:prstGeom prst="rect">
+            <a:avLst/>
+          </a:prstGeom>
+          <a:noFill/>
+        </p:spPr>
+        <p:txBody>
+          <a:bodyPr wrap="square">
+            <a:spAutoFit/>
+          </a:bodyPr>
+          <a:lstStyle/>
+          <a:p>
+            <a:pPr algn="l">
+              <a:lnSpc>
+                <a:spcPct val="100000"/>
+              </a:lnSpc>
+              <a:spcAft>
+                <a:spcPts val="800"/>
+              </a:spcAft>
+            </a:pPr>
+            <a:r>
+              <a:rPr sz="1400" b="1">
+                <a:solidFill>
+                  <a:srgbClr val="E2E8F0"/>
+                </a:solidFill>
+                <a:latin typeface="Segoe UI"/>
+              </a:rPr>
+              <a:t>Open-Meteo</a:t>
+            </a:r>
+          </a:p>
+        </p:txBody>
+      </p:sp>
+      <p:sp>
+        <p:nvSpPr>
           <p:cNvPr id="13" name="TextBox 12"/>
           <p:cNvSpPr txBox="1"/>
           <p:nvPr/>
         </p:nvSpPr>
         <p:spPr>
           <a:xfrm>
-            <a:off x="2670048" y="3401568"/>
-            <a:ext cx="6858000" cy="603504"/>
+            <a:off x="5760720" y="2414016"/>
+            <a:ext cx="4206240" cy="411480"/>
           </a:xfrm>
           <a:prstGeom prst="rect">
             <a:avLst/>
@@ -8198,56 +9258,47 @@
           <a:noFill/>
         </p:spPr>
         <p:txBody>
-          <a:bodyPr wrap="square" anchor="ctr">
+          <a:bodyPr wrap="square">
             <a:spAutoFit/>
           </a:bodyPr>
           <a:lstStyle/>
           <a:p>
-            <a:pPr algn="ctr">
-              <a:lnSpc>
-                <a:spcPct val="100000"/>
-              </a:lnSpc>
-              <a:spcAft>
-                <a:spcPts val="0"/>
-              </a:spcAft>
-            </a:pPr>
-            <a:r>
-              <a:rPr sz="1400" b="1">
-                <a:solidFill>
-                  <a:srgbClr val="E2E8F0"/>
-                </a:solidFill>
-                <a:latin typeface="Segoe UI"/>
-              </a:rPr>
-              <a:t>Moteur de recommandation — </a:t>
-            </a:r>
-            <a:r>
-              <a:rPr sz="1400" b="1">
+            <a:pPr algn="l">
+              <a:lnSpc>
+                <a:spcPct val="100000"/>
+              </a:lnSpc>
+              <a:spcAft>
+                <a:spcPts val="800"/>
+              </a:spcAft>
+            </a:pPr>
+            <a:r>
+              <a:rPr sz="1300" b="0">
                 <a:solidFill>
                   <a:srgbClr val="94A3B8"/>
                 </a:solidFill>
                 <a:latin typeface="Segoe UI"/>
               </a:rPr>
-              <a:t>collecte · affinité ML (cosinus) · score min-max pondéré</a:t>
-            </a:r>
-          </a:p>
-        </p:txBody>
-      </p:sp>
-      <p:sp>
-        <p:nvSpPr>
-          <p:cNvPr id="14" name="Down Arrow 13"/>
+              <a:t>météo à l'arrivée</a:t>
+            </a:r>
+          </a:p>
+        </p:txBody>
+      </p:sp>
+      <p:sp>
+        <p:nvSpPr>
+          <p:cNvPr id="14" name="Rounded Rectangle 13"/>
           <p:cNvSpPr/>
           <p:nvPr/>
         </p:nvSpPr>
         <p:spPr>
           <a:xfrm>
-            <a:off x="5998464" y="4059936"/>
-            <a:ext cx="201168" cy="292608"/>
-          </a:xfrm>
-          <a:prstGeom prst="downArrow">
+            <a:off x="10104120" y="2423160"/>
+            <a:ext cx="1097280" cy="384048"/>
+          </a:xfrm>
+          <a:prstGeom prst="roundRect">
             <a:avLst/>
           </a:prstGeom>
           <a:solidFill>
-            <a:srgbClr val="38BDF8"/>
+            <a:srgbClr val="0F172A"/>
           </a:solidFill>
           <a:ln>
             <a:noFill/>
@@ -8278,14 +9329,56 @@
       </p:sp>
       <p:sp>
         <p:nvSpPr>
-          <p:cNvPr id="15" name="Rounded Rectangle 14"/>
+          <p:cNvPr id="15" name="TextBox 14"/>
+          <p:cNvSpPr txBox="1"/>
+          <p:nvPr/>
+        </p:nvSpPr>
+        <p:spPr>
+          <a:xfrm>
+            <a:off x="10104120" y="2423160"/>
+            <a:ext cx="1097280" cy="384048"/>
+          </a:xfrm>
+          <a:prstGeom prst="rect">
+            <a:avLst/>
+          </a:prstGeom>
+          <a:noFill/>
+        </p:spPr>
+        <p:txBody>
+          <a:bodyPr wrap="square" anchor="ctr">
+            <a:spAutoFit/>
+          </a:bodyPr>
+          <a:lstStyle/>
+          <a:p>
+            <a:pPr algn="ctr">
+              <a:lnSpc>
+                <a:spcPct val="100000"/>
+              </a:lnSpc>
+              <a:spcAft>
+                <a:spcPts val="0"/>
+              </a:spcAft>
+            </a:pPr>
+            <a:r>
+              <a:rPr sz="1100" b="1">
+                <a:solidFill>
+                  <a:srgbClr val="22C55E"/>
+                </a:solidFill>
+                <a:latin typeface="Segoe UI"/>
+              </a:rPr>
+              <a:t>sans clé</a:t>
+            </a:r>
+          </a:p>
+        </p:txBody>
+      </p:sp>
+      <p:sp>
+        <p:nvSpPr>
+          <p:cNvPr id="16" name="Rounded Rectangle 15"/>
           <p:cNvSpPr/>
           <p:nvPr/>
         </p:nvSpPr>
         <p:spPr>
           <a:xfrm>
-            <a:off x="777240" y="4443984"/>
-            <a:ext cx="1700784" cy="841248"/>
+            <a:off x="777240" y="2999232"/>
+            <a:ext cx="10607040" cy="566928"/>
           </a:xfrm>
           <a:prstGeom prst="roundRect">
             <a:avLst/>
@@ -8322,14 +9415,142 @@
       </p:sp>
       <p:sp>
         <p:nvSpPr>
-          <p:cNvPr id="16" name="TextBox 15"/>
+          <p:cNvPr id="17" name="TextBox 16"/>
           <p:cNvSpPr txBox="1"/>
           <p:nvPr/>
         </p:nvSpPr>
         <p:spPr>
           <a:xfrm>
-            <a:off x="777240" y="4443984"/>
-            <a:ext cx="1700784" cy="841248"/>
+            <a:off x="1051560" y="3081528"/>
+            <a:ext cx="4663440" cy="411480"/>
+          </a:xfrm>
+          <a:prstGeom prst="rect">
+            <a:avLst/>
+          </a:prstGeom>
+          <a:noFill/>
+        </p:spPr>
+        <p:txBody>
+          <a:bodyPr wrap="square">
+            <a:spAutoFit/>
+          </a:bodyPr>
+          <a:lstStyle/>
+          <a:p>
+            <a:pPr algn="l">
+              <a:lnSpc>
+                <a:spcPct val="100000"/>
+              </a:lnSpc>
+              <a:spcAft>
+                <a:spcPts val="800"/>
+              </a:spcAft>
+            </a:pPr>
+            <a:r>
+              <a:rPr sz="1400" b="1">
+                <a:solidFill>
+                  <a:srgbClr val="E2E8F0"/>
+                </a:solidFill>
+                <a:latin typeface="Segoe UI"/>
+              </a:rPr>
+              <a:t>DATAtourisme → repli OpenStreetMap</a:t>
+            </a:r>
+          </a:p>
+        </p:txBody>
+      </p:sp>
+      <p:sp>
+        <p:nvSpPr>
+          <p:cNvPr id="18" name="TextBox 17"/>
+          <p:cNvSpPr txBox="1"/>
+          <p:nvPr/>
+        </p:nvSpPr>
+        <p:spPr>
+          <a:xfrm>
+            <a:off x="5760720" y="3081528"/>
+            <a:ext cx="4206240" cy="411480"/>
+          </a:xfrm>
+          <a:prstGeom prst="rect">
+            <a:avLst/>
+          </a:prstGeom>
+          <a:noFill/>
+        </p:spPr>
+        <p:txBody>
+          <a:bodyPr wrap="square">
+            <a:spAutoFit/>
+          </a:bodyPr>
+          <a:lstStyle/>
+          <a:p>
+            <a:pPr algn="l">
+              <a:lnSpc>
+                <a:spcPct val="100000"/>
+              </a:lnSpc>
+              <a:spcAft>
+                <a:spcPts val="800"/>
+              </a:spcAft>
+            </a:pPr>
+            <a:r>
+              <a:rPr sz="1300" b="0">
+                <a:solidFill>
+                  <a:srgbClr val="94A3B8"/>
+                </a:solidFill>
+                <a:latin typeface="Segoe UI"/>
+              </a:rPr>
+              <a:t>POIs touristiques dans le rayon de marche</a:t>
+            </a:r>
+          </a:p>
+        </p:txBody>
+      </p:sp>
+      <p:sp>
+        <p:nvSpPr>
+          <p:cNvPr id="19" name="Rounded Rectangle 18"/>
+          <p:cNvSpPr/>
+          <p:nvPr/>
+        </p:nvSpPr>
+        <p:spPr>
+          <a:xfrm>
+            <a:off x="10104120" y="3090672"/>
+            <a:ext cx="1097280" cy="384048"/>
+          </a:xfrm>
+          <a:prstGeom prst="roundRect">
+            <a:avLst/>
+          </a:prstGeom>
+          <a:solidFill>
+            <a:srgbClr val="0F172A"/>
+          </a:solidFill>
+          <a:ln>
+            <a:noFill/>
+          </a:ln>
+          <a:effectLst/>
+        </p:spPr>
+        <p:style>
+          <a:lnRef idx="1">
+            <a:schemeClr val="accent1"/>
+          </a:lnRef>
+          <a:fillRef idx="3">
+            <a:schemeClr val="accent1"/>
+          </a:fillRef>
+          <a:effectRef idx="2">
+            <a:schemeClr val="accent1"/>
+          </a:effectRef>
+          <a:fontRef idx="minor">
+            <a:schemeClr val="lt1"/>
+          </a:fontRef>
+        </p:style>
+        <p:txBody>
+          <a:bodyPr rtlCol="0" anchor="ctr"/>
+          <a:lstStyle/>
+          <a:p>
+            <a:pPr algn="ctr"/>
+          </a:p>
+        </p:txBody>
+      </p:sp>
+      <p:sp>
+        <p:nvSpPr>
+          <p:cNvPr id="20" name="TextBox 19"/>
+          <p:cNvSpPr txBox="1"/>
+          <p:nvPr/>
+        </p:nvSpPr>
+        <p:spPr>
+          <a:xfrm>
+            <a:off x="10104120" y="3090672"/>
+            <a:ext cx="1097280" cy="384048"/>
           </a:xfrm>
           <a:prstGeom prst="rect">
             <a:avLst/>
@@ -8351,46 +9572,27 @@
               </a:spcAft>
             </a:pPr>
             <a:r>
-              <a:rPr sz="1250" b="1">
-                <a:solidFill>
-                  <a:srgbClr val="E2E8F0"/>
-                </a:solidFill>
-                <a:latin typeface="Segoe UI"/>
-              </a:rPr>
-              <a:t>API SNCF</a:t>
-            </a:r>
-          </a:p>
-          <a:p>
-            <a:pPr algn="ctr">
-              <a:lnSpc>
-                <a:spcPct val="100000"/>
-              </a:lnSpc>
-              <a:spcAft>
-                <a:spcPts val="0"/>
-              </a:spcAft>
-            </a:pPr>
-            <a:r>
               <a:rPr sz="1100" b="1">
                 <a:solidFill>
-                  <a:srgbClr val="94A3B8"/>
-                </a:solidFill>
-                <a:latin typeface="Segoe UI"/>
-              </a:rPr>
-              <a:t>/places · /journeys</a:t>
-            </a:r>
-          </a:p>
-        </p:txBody>
-      </p:sp>
-      <p:sp>
-        <p:nvSpPr>
-          <p:cNvPr id="17" name="Rounded Rectangle 16"/>
+                  <a:srgbClr val="F59E0B"/>
+                </a:solidFill>
+                <a:latin typeface="Segoe UI"/>
+              </a:rPr>
+              <a:t>clé</a:t>
+            </a:r>
+          </a:p>
+        </p:txBody>
+      </p:sp>
+      <p:sp>
+        <p:nvSpPr>
+          <p:cNvPr id="21" name="Rounded Rectangle 20"/>
           <p:cNvSpPr/>
           <p:nvPr/>
         </p:nvSpPr>
         <p:spPr>
           <a:xfrm>
-            <a:off x="2562148" y="4443984"/>
-            <a:ext cx="1700784" cy="841248"/>
+            <a:off x="777240" y="3666744"/>
+            <a:ext cx="10607040" cy="566928"/>
           </a:xfrm>
           <a:prstGeom prst="roundRect">
             <a:avLst/>
@@ -8427,14 +9629,142 @@
       </p:sp>
       <p:sp>
         <p:nvSpPr>
-          <p:cNvPr id="18" name="TextBox 17"/>
+          <p:cNvPr id="22" name="TextBox 21"/>
           <p:cNvSpPr txBox="1"/>
           <p:nvPr/>
         </p:nvSpPr>
         <p:spPr>
           <a:xfrm>
-            <a:off x="2562148" y="4443984"/>
-            <a:ext cx="1700784" cy="841248"/>
+            <a:off x="1051560" y="3749040"/>
+            <a:ext cx="4663440" cy="411480"/>
+          </a:xfrm>
+          <a:prstGeom prst="rect">
+            <a:avLst/>
+          </a:prstGeom>
+          <a:noFill/>
+        </p:spPr>
+        <p:txBody>
+          <a:bodyPr wrap="square">
+            <a:spAutoFit/>
+          </a:bodyPr>
+          <a:lstStyle/>
+          <a:p>
+            <a:pPr algn="l">
+              <a:lnSpc>
+                <a:spcPct val="100000"/>
+              </a:lnSpc>
+              <a:spcAft>
+                <a:spcPts val="800"/>
+              </a:spcAft>
+            </a:pPr>
+            <a:r>
+              <a:rPr sz="1400" b="1">
+                <a:solidFill>
+                  <a:srgbClr val="E2E8F0"/>
+                </a:solidFill>
+                <a:latin typeface="Segoe UI"/>
+              </a:rPr>
+              <a:t>frequentation-gares (SNCF)</a:t>
+            </a:r>
+          </a:p>
+        </p:txBody>
+      </p:sp>
+      <p:sp>
+        <p:nvSpPr>
+          <p:cNvPr id="23" name="TextBox 22"/>
+          <p:cNvSpPr txBox="1"/>
+          <p:nvPr/>
+        </p:nvSpPr>
+        <p:spPr>
+          <a:xfrm>
+            <a:off x="5760720" y="3749040"/>
+            <a:ext cx="4206240" cy="411480"/>
+          </a:xfrm>
+          <a:prstGeom prst="rect">
+            <a:avLst/>
+          </a:prstGeom>
+          <a:noFill/>
+        </p:spPr>
+        <p:txBody>
+          <a:bodyPr wrap="square">
+            <a:spAutoFit/>
+          </a:bodyPr>
+          <a:lstStyle/>
+          <a:p>
+            <a:pPr algn="l">
+              <a:lnSpc>
+                <a:spcPct val="100000"/>
+              </a:lnSpc>
+              <a:spcAft>
+                <a:spcPts val="800"/>
+              </a:spcAft>
+            </a:pPr>
+            <a:r>
+              <a:rPr sz="1300" b="0">
+                <a:solidFill>
+                  <a:srgbClr val="94A3B8"/>
+                </a:solidFill>
+                <a:latin typeface="Segoe UI"/>
+              </a:rPr>
+              <a:t>voyageurs/an → critère « calme »</a:t>
+            </a:r>
+          </a:p>
+        </p:txBody>
+      </p:sp>
+      <p:sp>
+        <p:nvSpPr>
+          <p:cNvPr id="24" name="Rounded Rectangle 23"/>
+          <p:cNvSpPr/>
+          <p:nvPr/>
+        </p:nvSpPr>
+        <p:spPr>
+          <a:xfrm>
+            <a:off x="10104120" y="3758184"/>
+            <a:ext cx="1097280" cy="384048"/>
+          </a:xfrm>
+          <a:prstGeom prst="roundRect">
+            <a:avLst/>
+          </a:prstGeom>
+          <a:solidFill>
+            <a:srgbClr val="0F172A"/>
+          </a:solidFill>
+          <a:ln>
+            <a:noFill/>
+          </a:ln>
+          <a:effectLst/>
+        </p:spPr>
+        <p:style>
+          <a:lnRef idx="1">
+            <a:schemeClr val="accent1"/>
+          </a:lnRef>
+          <a:fillRef idx="3">
+            <a:schemeClr val="accent1"/>
+          </a:fillRef>
+          <a:effectRef idx="2">
+            <a:schemeClr val="accent1"/>
+          </a:effectRef>
+          <a:fontRef idx="minor">
+            <a:schemeClr val="lt1"/>
+          </a:fontRef>
+        </p:style>
+        <p:txBody>
+          <a:bodyPr rtlCol="0" anchor="ctr"/>
+          <a:lstStyle/>
+          <a:p>
+            <a:pPr algn="ctr"/>
+          </a:p>
+        </p:txBody>
+      </p:sp>
+      <p:sp>
+        <p:nvSpPr>
+          <p:cNvPr id="25" name="TextBox 24"/>
+          <p:cNvSpPr txBox="1"/>
+          <p:nvPr/>
+        </p:nvSpPr>
+        <p:spPr>
+          <a:xfrm>
+            <a:off x="10104120" y="3758184"/>
+            <a:ext cx="1097280" cy="384048"/>
           </a:xfrm>
           <a:prstGeom prst="rect">
             <a:avLst/>
@@ -8456,46 +9786,27 @@
               </a:spcAft>
             </a:pPr>
             <a:r>
-              <a:rPr sz="1250" b="1">
-                <a:solidFill>
-                  <a:srgbClr val="E2E8F0"/>
-                </a:solidFill>
-                <a:latin typeface="Segoe UI"/>
-              </a:rPr>
-              <a:t>Open-Meteo</a:t>
-            </a:r>
-          </a:p>
-          <a:p>
-            <a:pPr algn="ctr">
-              <a:lnSpc>
-                <a:spcPct val="100000"/>
-              </a:lnSpc>
-              <a:spcAft>
-                <a:spcPts val="0"/>
-              </a:spcAft>
-            </a:pPr>
-            <a:r>
               <a:rPr sz="1100" b="1">
                 <a:solidFill>
-                  <a:srgbClr val="94A3B8"/>
-                </a:solidFill>
-                <a:latin typeface="Segoe UI"/>
-              </a:rPr>
-              <a:t>météo</a:t>
-            </a:r>
-          </a:p>
-        </p:txBody>
-      </p:sp>
-      <p:sp>
-        <p:nvSpPr>
-          <p:cNvPr id="19" name="Rounded Rectangle 18"/>
+                  <a:srgbClr val="22C55E"/>
+                </a:solidFill>
+                <a:latin typeface="Segoe UI"/>
+              </a:rPr>
+              <a:t>sans clé</a:t>
+            </a:r>
+          </a:p>
+        </p:txBody>
+      </p:sp>
+      <p:sp>
+        <p:nvSpPr>
+          <p:cNvPr id="26" name="Rounded Rectangle 25"/>
           <p:cNvSpPr/>
           <p:nvPr/>
         </p:nvSpPr>
         <p:spPr>
           <a:xfrm>
-            <a:off x="4347056" y="4443984"/>
-            <a:ext cx="1700784" cy="841248"/>
+            <a:off x="777240" y="4334256"/>
+            <a:ext cx="10607040" cy="566928"/>
           </a:xfrm>
           <a:prstGeom prst="roundRect">
             <a:avLst/>
@@ -8532,14 +9843,142 @@
       </p:sp>
       <p:sp>
         <p:nvSpPr>
-          <p:cNvPr id="20" name="TextBox 19"/>
+          <p:cNvPr id="27" name="TextBox 26"/>
           <p:cNvSpPr txBox="1"/>
           <p:nvPr/>
         </p:nvSpPr>
         <p:spPr>
           <a:xfrm>
-            <a:off x="4347056" y="4443984"/>
-            <a:ext cx="1700784" cy="841248"/>
+            <a:off x="1051560" y="4416552"/>
+            <a:ext cx="4663440" cy="411480"/>
+          </a:xfrm>
+          <a:prstGeom prst="rect">
+            <a:avLst/>
+          </a:prstGeom>
+          <a:noFill/>
+        </p:spPr>
+        <p:txBody>
+          <a:bodyPr wrap="square">
+            <a:spAutoFit/>
+          </a:bodyPr>
+          <a:lstStyle/>
+          <a:p>
+            <a:pPr algn="l">
+              <a:lnSpc>
+                <a:spcPct val="100000"/>
+              </a:lnSpc>
+              <a:spcAft>
+                <a:spcPts val="800"/>
+              </a:spcAft>
+            </a:pPr>
+            <a:r>
+              <a:rPr sz="1400" b="1">
+                <a:solidFill>
+                  <a:srgbClr val="E2E8F0"/>
+                </a:solidFill>
+                <a:latin typeface="Segoe UI"/>
+              </a:rPr>
+              <a:t>ADEME Impact CO2</a:t>
+            </a:r>
+          </a:p>
+        </p:txBody>
+      </p:sp>
+      <p:sp>
+        <p:nvSpPr>
+          <p:cNvPr id="28" name="TextBox 27"/>
+          <p:cNvSpPr txBox="1"/>
+          <p:nvPr/>
+        </p:nvSpPr>
+        <p:spPr>
+          <a:xfrm>
+            <a:off x="5760720" y="4416552"/>
+            <a:ext cx="4206240" cy="411480"/>
+          </a:xfrm>
+          <a:prstGeom prst="rect">
+            <a:avLst/>
+          </a:prstGeom>
+          <a:noFill/>
+        </p:spPr>
+        <p:txBody>
+          <a:bodyPr wrap="square">
+            <a:spAutoFit/>
+          </a:bodyPr>
+          <a:lstStyle/>
+          <a:p>
+            <a:pPr algn="l">
+              <a:lnSpc>
+                <a:spcPct val="100000"/>
+              </a:lnSpc>
+              <a:spcAft>
+                <a:spcPts val="800"/>
+              </a:spcAft>
+            </a:pPr>
+            <a:r>
+              <a:rPr sz="1300" b="0">
+                <a:solidFill>
+                  <a:srgbClr val="94A3B8"/>
+                </a:solidFill>
+                <a:latin typeface="Segoe UI"/>
+              </a:rPr>
+              <a:t>CO₂ voiture officiel → économie vs voiture</a:t>
+            </a:r>
+          </a:p>
+        </p:txBody>
+      </p:sp>
+      <p:sp>
+        <p:nvSpPr>
+          <p:cNvPr id="29" name="Rounded Rectangle 28"/>
+          <p:cNvSpPr/>
+          <p:nvPr/>
+        </p:nvSpPr>
+        <p:spPr>
+          <a:xfrm>
+            <a:off x="10104120" y="4425696"/>
+            <a:ext cx="1097280" cy="384048"/>
+          </a:xfrm>
+          <a:prstGeom prst="roundRect">
+            <a:avLst/>
+          </a:prstGeom>
+          <a:solidFill>
+            <a:srgbClr val="0F172A"/>
+          </a:solidFill>
+          <a:ln>
+            <a:noFill/>
+          </a:ln>
+          <a:effectLst/>
+        </p:spPr>
+        <p:style>
+          <a:lnRef idx="1">
+            <a:schemeClr val="accent1"/>
+          </a:lnRef>
+          <a:fillRef idx="3">
+            <a:schemeClr val="accent1"/>
+          </a:fillRef>
+          <a:effectRef idx="2">
+            <a:schemeClr val="accent1"/>
+          </a:effectRef>
+          <a:fontRef idx="minor">
+            <a:schemeClr val="lt1"/>
+          </a:fontRef>
+        </p:style>
+        <p:txBody>
+          <a:bodyPr rtlCol="0" anchor="ctr"/>
+          <a:lstStyle/>
+          <a:p>
+            <a:pPr algn="ctr"/>
+          </a:p>
+        </p:txBody>
+      </p:sp>
+      <p:sp>
+        <p:nvSpPr>
+          <p:cNvPr id="30" name="TextBox 29"/>
+          <p:cNvSpPr txBox="1"/>
+          <p:nvPr/>
+        </p:nvSpPr>
+        <p:spPr>
+          <a:xfrm>
+            <a:off x="10104120" y="4425696"/>
+            <a:ext cx="1097280" cy="384048"/>
           </a:xfrm>
           <a:prstGeom prst="rect">
             <a:avLst/>
@@ -8561,46 +10000,27 @@
               </a:spcAft>
             </a:pPr>
             <a:r>
-              <a:rPr sz="1250" b="1">
-                <a:solidFill>
-                  <a:srgbClr val="E2E8F0"/>
-                </a:solidFill>
-                <a:latin typeface="Segoe UI"/>
-              </a:rPr>
-              <a:t>DATAtourisme</a:t>
-            </a:r>
-          </a:p>
-          <a:p>
-            <a:pPr algn="ctr">
-              <a:lnSpc>
-                <a:spcPct val="100000"/>
-              </a:lnSpc>
-              <a:spcAft>
-                <a:spcPts val="0"/>
-              </a:spcAft>
-            </a:pPr>
-            <a:r>
               <a:rPr sz="1100" b="1">
                 <a:solidFill>
-                  <a:srgbClr val="94A3B8"/>
-                </a:solidFill>
-                <a:latin typeface="Segoe UI"/>
-              </a:rPr>
-              <a:t>(repli OSM)</a:t>
-            </a:r>
-          </a:p>
-        </p:txBody>
-      </p:sp>
-      <p:sp>
-        <p:nvSpPr>
-          <p:cNvPr id="21" name="Rounded Rectangle 20"/>
+                  <a:srgbClr val="F59E0B"/>
+                </a:solidFill>
+                <a:latin typeface="Segoe UI"/>
+              </a:rPr>
+              <a:t>clé</a:t>
+            </a:r>
+          </a:p>
+        </p:txBody>
+      </p:sp>
+      <p:sp>
+        <p:nvSpPr>
+          <p:cNvPr id="31" name="Rounded Rectangle 30"/>
           <p:cNvSpPr/>
           <p:nvPr/>
         </p:nvSpPr>
         <p:spPr>
           <a:xfrm>
-            <a:off x="6131964" y="4443984"/>
-            <a:ext cx="1700784" cy="841248"/>
+            <a:off x="777240" y="5001768"/>
+            <a:ext cx="10607040" cy="566928"/>
           </a:xfrm>
           <a:prstGeom prst="roundRect">
             <a:avLst/>
@@ -8637,14 +10057,142 @@
       </p:sp>
       <p:sp>
         <p:nvSpPr>
-          <p:cNvPr id="22" name="TextBox 21"/>
+          <p:cNvPr id="32" name="TextBox 31"/>
           <p:cNvSpPr txBox="1"/>
           <p:nvPr/>
         </p:nvSpPr>
         <p:spPr>
           <a:xfrm>
-            <a:off x="6131964" y="4443984"/>
-            <a:ext cx="1700784" cy="841248"/>
+            <a:off x="1051560" y="5084064"/>
+            <a:ext cx="4663440" cy="411480"/>
+          </a:xfrm>
+          <a:prstGeom prst="rect">
+            <a:avLst/>
+          </a:prstGeom>
+          <a:noFill/>
+        </p:spPr>
+        <p:txBody>
+          <a:bodyPr wrap="square">
+            <a:spAutoFit/>
+          </a:bodyPr>
+          <a:lstStyle/>
+          <a:p>
+            <a:pPr algn="l">
+              <a:lnSpc>
+                <a:spcPct val="100000"/>
+              </a:lnSpc>
+              <a:spcAft>
+                <a:spcPts val="800"/>
+              </a:spcAft>
+            </a:pPr>
+            <a:r>
+              <a:rPr sz="1400" b="1">
+                <a:solidFill>
+                  <a:srgbClr val="E2E8F0"/>
+                </a:solidFill>
+                <a:latin typeface="Segoe UI"/>
+              </a:rPr>
+              <a:t>OpenAgenda</a:t>
+            </a:r>
+          </a:p>
+        </p:txBody>
+      </p:sp>
+      <p:sp>
+        <p:nvSpPr>
+          <p:cNvPr id="33" name="TextBox 32"/>
+          <p:cNvSpPr txBox="1"/>
+          <p:nvPr/>
+        </p:nvSpPr>
+        <p:spPr>
+          <a:xfrm>
+            <a:off x="5760720" y="5084064"/>
+            <a:ext cx="4206240" cy="411480"/>
+          </a:xfrm>
+          <a:prstGeom prst="rect">
+            <a:avLst/>
+          </a:prstGeom>
+          <a:noFill/>
+        </p:spPr>
+        <p:txBody>
+          <a:bodyPr wrap="square">
+            <a:spAutoFit/>
+          </a:bodyPr>
+          <a:lstStyle/>
+          <a:p>
+            <a:pPr algn="l">
+              <a:lnSpc>
+                <a:spcPct val="100000"/>
+              </a:lnSpc>
+              <a:spcAft>
+                <a:spcPts val="800"/>
+              </a:spcAft>
+            </a:pPr>
+            <a:r>
+              <a:rPr sz="1300" b="0">
+                <a:solidFill>
+                  <a:srgbClr val="94A3B8"/>
+                </a:solidFill>
+                <a:latin typeface="Segoe UI"/>
+              </a:rPr>
+              <a:t>événements à venir dans la ville</a:t>
+            </a:r>
+          </a:p>
+        </p:txBody>
+      </p:sp>
+      <p:sp>
+        <p:nvSpPr>
+          <p:cNvPr id="34" name="Rounded Rectangle 33"/>
+          <p:cNvSpPr/>
+          <p:nvPr/>
+        </p:nvSpPr>
+        <p:spPr>
+          <a:xfrm>
+            <a:off x="10104120" y="5093208"/>
+            <a:ext cx="1097280" cy="384048"/>
+          </a:xfrm>
+          <a:prstGeom prst="roundRect">
+            <a:avLst/>
+          </a:prstGeom>
+          <a:solidFill>
+            <a:srgbClr val="0F172A"/>
+          </a:solidFill>
+          <a:ln>
+            <a:noFill/>
+          </a:ln>
+          <a:effectLst/>
+        </p:spPr>
+        <p:style>
+          <a:lnRef idx="1">
+            <a:schemeClr val="accent1"/>
+          </a:lnRef>
+          <a:fillRef idx="3">
+            <a:schemeClr val="accent1"/>
+          </a:fillRef>
+          <a:effectRef idx="2">
+            <a:schemeClr val="accent1"/>
+          </a:effectRef>
+          <a:fontRef idx="minor">
+            <a:schemeClr val="lt1"/>
+          </a:fontRef>
+        </p:style>
+        <p:txBody>
+          <a:bodyPr rtlCol="0" anchor="ctr"/>
+          <a:lstStyle/>
+          <a:p>
+            <a:pPr algn="ctr"/>
+          </a:p>
+        </p:txBody>
+      </p:sp>
+      <p:sp>
+        <p:nvSpPr>
+          <p:cNvPr id="35" name="TextBox 34"/>
+          <p:cNvSpPr txBox="1"/>
+          <p:nvPr/>
+        </p:nvSpPr>
+        <p:spPr>
+          <a:xfrm>
+            <a:off x="10104120" y="5093208"/>
+            <a:ext cx="1097280" cy="384048"/>
           </a:xfrm>
           <a:prstGeom prst="rect">
             <a:avLst/>
@@ -8666,46 +10214,27 @@
               </a:spcAft>
             </a:pPr>
             <a:r>
-              <a:rPr sz="1250" b="1">
-                <a:solidFill>
-                  <a:srgbClr val="E2E8F0"/>
-                </a:solidFill>
-                <a:latin typeface="Segoe UI"/>
-              </a:rPr>
-              <a:t>OpenAgenda</a:t>
-            </a:r>
-          </a:p>
-          <a:p>
-            <a:pPr algn="ctr">
-              <a:lnSpc>
-                <a:spcPct val="100000"/>
-              </a:lnSpc>
-              <a:spcAft>
-                <a:spcPts val="0"/>
-              </a:spcAft>
-            </a:pPr>
-            <a:r>
               <a:rPr sz="1100" b="1">
                 <a:solidFill>
-                  <a:srgbClr val="94A3B8"/>
-                </a:solidFill>
-                <a:latin typeface="Segoe UI"/>
-              </a:rPr>
-              <a:t>événements</a:t>
-            </a:r>
-          </a:p>
-        </p:txBody>
-      </p:sp>
-      <p:sp>
-        <p:nvSpPr>
-          <p:cNvPr id="23" name="Rounded Rectangle 22"/>
+                  <a:srgbClr val="F59E0B"/>
+                </a:solidFill>
+                <a:latin typeface="Segoe UI"/>
+              </a:rPr>
+              <a:t>clé</a:t>
+            </a:r>
+          </a:p>
+        </p:txBody>
+      </p:sp>
+      <p:sp>
+        <p:nvSpPr>
+          <p:cNvPr id="36" name="Rounded Rectangle 35"/>
           <p:cNvSpPr/>
           <p:nvPr/>
         </p:nvSpPr>
         <p:spPr>
           <a:xfrm>
-            <a:off x="7916872" y="4443984"/>
-            <a:ext cx="1700784" cy="841248"/>
+            <a:off x="777240" y="5669280"/>
+            <a:ext cx="10607040" cy="566928"/>
           </a:xfrm>
           <a:prstGeom prst="roundRect">
             <a:avLst/>
@@ -8742,14 +10271,14 @@
       </p:sp>
       <p:sp>
         <p:nvSpPr>
-          <p:cNvPr id="24" name="TextBox 23"/>
+          <p:cNvPr id="37" name="TextBox 36"/>
           <p:cNvSpPr txBox="1"/>
           <p:nvPr/>
         </p:nvSpPr>
         <p:spPr>
           <a:xfrm>
-            <a:off x="7916872" y="4443984"/>
-            <a:ext cx="1700784" cy="841248"/>
+            <a:off x="1051560" y="5751576"/>
+            <a:ext cx="4663440" cy="411480"/>
           </a:xfrm>
           <a:prstGeom prst="rect">
             <a:avLst/>
@@ -8757,66 +10286,89 @@
           <a:noFill/>
         </p:spPr>
         <p:txBody>
-          <a:bodyPr wrap="square" anchor="ctr">
+          <a:bodyPr wrap="square">
             <a:spAutoFit/>
           </a:bodyPr>
           <a:lstStyle/>
           <a:p>
-            <a:pPr algn="ctr">
-              <a:lnSpc>
-                <a:spcPct val="100000"/>
-              </a:lnSpc>
-              <a:spcAft>
-                <a:spcPts val="0"/>
-              </a:spcAft>
-            </a:pPr>
-            <a:r>
-              <a:rPr sz="1250" b="1">
+            <a:pPr algn="l">
+              <a:lnSpc>
+                <a:spcPct val="100000"/>
+              </a:lnSpc>
+              <a:spcAft>
+                <a:spcPts val="800"/>
+              </a:spcAft>
+            </a:pPr>
+            <a:r>
+              <a:rPr sz="1400" b="1">
                 <a:solidFill>
                   <a:srgbClr val="E2E8F0"/>
                 </a:solidFill>
                 <a:latin typeface="Segoe UI"/>
               </a:rPr>
-              <a:t>ADEME</a:t>
-            </a:r>
-          </a:p>
-          <a:p>
-            <a:pPr algn="ctr">
-              <a:lnSpc>
-                <a:spcPct val="100000"/>
-              </a:lnSpc>
-              <a:spcAft>
-                <a:spcPts val="0"/>
-              </a:spcAft>
-            </a:pPr>
-            <a:r>
-              <a:rPr sz="1100" b="1">
+              <a:t>gares-de-voyageurs (SNCF)</a:t>
+            </a:r>
+          </a:p>
+        </p:txBody>
+      </p:sp>
+      <p:sp>
+        <p:nvSpPr>
+          <p:cNvPr id="38" name="TextBox 37"/>
+          <p:cNvSpPr txBox="1"/>
+          <p:nvPr/>
+        </p:nvSpPr>
+        <p:spPr>
+          <a:xfrm>
+            <a:off x="5760720" y="5751576"/>
+            <a:ext cx="4206240" cy="411480"/>
+          </a:xfrm>
+          <a:prstGeom prst="rect">
+            <a:avLst/>
+          </a:prstGeom>
+          <a:noFill/>
+        </p:spPr>
+        <p:txBody>
+          <a:bodyPr wrap="square">
+            <a:spAutoFit/>
+          </a:bodyPr>
+          <a:lstStyle/>
+          <a:p>
+            <a:pPr algn="l">
+              <a:lnSpc>
+                <a:spcPct val="100000"/>
+              </a:lnSpc>
+              <a:spcAft>
+                <a:spcPts val="800"/>
+              </a:spcAft>
+            </a:pPr>
+            <a:r>
+              <a:rPr sz="1300" b="0">
                 <a:solidFill>
                   <a:srgbClr val="94A3B8"/>
                 </a:solidFill>
                 <a:latin typeface="Segoe UI"/>
               </a:rPr>
-              <a:t>CO₂ voiture</a:t>
-            </a:r>
-          </a:p>
-        </p:txBody>
-      </p:sp>
-      <p:sp>
-        <p:nvSpPr>
-          <p:cNvPr id="25" name="Rounded Rectangle 24"/>
+              <a:t>référentiel des 2 782 gares de départ</a:t>
+            </a:r>
+          </a:p>
+        </p:txBody>
+      </p:sp>
+      <p:sp>
+        <p:nvSpPr>
+          <p:cNvPr id="39" name="Rounded Rectangle 38"/>
           <p:cNvSpPr/>
           <p:nvPr/>
         </p:nvSpPr>
         <p:spPr>
           <a:xfrm>
-            <a:off x="9701780" y="4443984"/>
-            <a:ext cx="1700784" cy="841248"/>
+            <a:off x="10104120" y="5760720"/>
+            <a:ext cx="1097280" cy="384048"/>
           </a:xfrm>
           <a:prstGeom prst="roundRect">
             <a:avLst/>
           </a:prstGeom>
           <a:solidFill>
-            <a:srgbClr val="1E293B"/>
+            <a:srgbClr val="0F172A"/>
           </a:solidFill>
           <a:ln>
             <a:noFill/>
@@ -8847,14 +10399,14 @@
       </p:sp>
       <p:sp>
         <p:nvSpPr>
-          <p:cNvPr id="26" name="TextBox 25"/>
+          <p:cNvPr id="40" name="TextBox 39"/>
           <p:cNvSpPr txBox="1"/>
           <p:nvPr/>
         </p:nvSpPr>
         <p:spPr>
           <a:xfrm>
-            <a:off x="9701780" y="4443984"/>
-            <a:ext cx="1700784" cy="841248"/>
+            <a:off x="10104120" y="5760720"/>
+            <a:ext cx="1097280" cy="384048"/>
           </a:xfrm>
           <a:prstGeom prst="rect">
             <a:avLst/>
@@ -8876,147 +10428,13 @@
               </a:spcAft>
             </a:pPr>
             <a:r>
-              <a:rPr sz="1250" b="1">
-                <a:solidFill>
-                  <a:srgbClr val="E2E8F0"/>
-                </a:solidFill>
-                <a:latin typeface="Segoe UI"/>
-              </a:rPr>
-              <a:t>frequentation-</a:t>
-            </a:r>
-          </a:p>
-          <a:p>
-            <a:pPr algn="ctr">
-              <a:lnSpc>
-                <a:spcPct val="100000"/>
-              </a:lnSpc>
-              <a:spcAft>
-                <a:spcPts val="0"/>
-              </a:spcAft>
-            </a:pPr>
-            <a:r>
               <a:rPr sz="1100" b="1">
                 <a:solidFill>
-                  <a:srgbClr val="94A3B8"/>
-                </a:solidFill>
-                <a:latin typeface="Segoe UI"/>
-              </a:rPr>
-              <a:t>gares</a:t>
-            </a:r>
-          </a:p>
-        </p:txBody>
-      </p:sp>
-      <p:sp>
-        <p:nvSpPr>
-          <p:cNvPr id="27" name="Rounded Rectangle 26"/>
-          <p:cNvSpPr/>
-          <p:nvPr/>
-        </p:nvSpPr>
-        <p:spPr>
-          <a:xfrm>
-            <a:off x="777240" y="5596128"/>
-            <a:ext cx="10607040" cy="859536"/>
-          </a:xfrm>
-          <a:prstGeom prst="roundRect">
-            <a:avLst/>
-          </a:prstGeom>
-          <a:solidFill>
-            <a:srgbClr val="1E293B"/>
-          </a:solidFill>
-          <a:ln w="15240">
-            <a:solidFill>
-              <a:srgbClr val="22C55E"/>
-            </a:solidFill>
-          </a:ln>
-          <a:effectLst/>
-        </p:spPr>
-        <p:style>
-          <a:lnRef idx="1">
-            <a:schemeClr val="accent1"/>
-          </a:lnRef>
-          <a:fillRef idx="3">
-            <a:schemeClr val="accent1"/>
-          </a:fillRef>
-          <a:effectRef idx="2">
-            <a:schemeClr val="accent1"/>
-          </a:effectRef>
-          <a:fontRef idx="minor">
-            <a:schemeClr val="lt1"/>
-          </a:fontRef>
-        </p:style>
-        <p:txBody>
-          <a:bodyPr rtlCol="0" anchor="ctr"/>
-          <a:lstStyle/>
-          <a:p>
-            <a:pPr algn="ctr"/>
-          </a:p>
-        </p:txBody>
-      </p:sp>
-      <p:sp>
-        <p:nvSpPr>
-          <p:cNvPr id="28" name="TextBox 27"/>
-          <p:cNvSpPr txBox="1"/>
-          <p:nvPr/>
-        </p:nvSpPr>
-        <p:spPr>
-          <a:xfrm>
-            <a:off x="1051560" y="5669280"/>
-            <a:ext cx="10149840" cy="731520"/>
-          </a:xfrm>
-          <a:prstGeom prst="rect">
-            <a:avLst/>
-          </a:prstGeom>
-          <a:noFill/>
-        </p:spPr>
-        <p:txBody>
-          <a:bodyPr wrap="square" anchor="ctr">
-            <a:spAutoFit/>
-          </a:bodyPr>
-          <a:lstStyle/>
-          <a:p>
-            <a:pPr algn="l">
-              <a:lnSpc>
-                <a:spcPct val="100000"/>
-              </a:lnSpc>
-              <a:spcAft>
-                <a:spcPts val="800"/>
-              </a:spcAft>
-            </a:pPr>
-            <a:r>
-              <a:rPr sz="1500" b="1">
-                <a:solidFill>
                   <a:srgbClr val="22C55E"/>
                 </a:solidFill>
                 <a:latin typeface="Segoe UI"/>
               </a:rPr>
-              <a:t>🛟 Mode dégradé : </a:t>
-            </a:r>
-            <a:r>
-              <a:rPr sz="1400" b="0">
-                <a:solidFill>
-                  <a:srgbClr val="94A3B8"/>
-                </a:solidFill>
-                <a:latin typeface="Segoe UI"/>
-              </a:rPr>
-              <a:t>chaque appel passe par cache/*.json — si l'API échoue ou </a:t>
-            </a:r>
-            <a:r>
-              <a:rPr sz="1300" b="0">
-                <a:solidFill>
-                  <a:srgbClr val="E2E8F0"/>
-                </a:solidFill>
-                <a:latin typeface="Consolas"/>
-              </a:rPr>
-              <a:t>RECO_CACHE_FIRST=1</a:t>
-            </a:r>
-            <a:r>
-              <a:rPr sz="1400" b="0">
-                <a:solidFill>
-                  <a:srgbClr val="94A3B8"/>
-                </a:solidFill>
-                <a:latin typeface="Segoe UI"/>
-              </a:rPr>
-              <a:t>, on sert le cache : la démo tourne hors-ligne</a:t>
+              <a:t>sans clé</a:t>
             </a:r>
           </a:p>
         </p:txBody>
@@ -9128,7 +10546,7 @@
                 </a:solidFill>
                 <a:latin typeface="Segoe UI"/>
               </a:rPr>
-              <a:t>7 sources de données croisées</a:t>
+              <a:t>Machine learning 1/2 — affinité content-based</a:t>
             </a:r>
           </a:p>
         </p:txBody>
@@ -9170,7 +10588,7 @@
                 </a:solidFill>
                 <a:latin typeface="Segoe UI"/>
               </a:rPr>
-              <a:t>Open data + APIs temps réel — aucune feature ne dépend uniquement de l'API</a:t>
+              <a:t>Similarité cosinus entre le profil d'activités de la ville et les envies de l'utilisateur</a:t>
             </a:r>
           </a:p>
         </p:txBody>
@@ -9225,8 +10643,8 @@
         </p:nvSpPr>
         <p:spPr>
           <a:xfrm>
-            <a:off x="777240" y="1664208"/>
-            <a:ext cx="10607040" cy="566928"/>
+            <a:off x="777240" y="1737360"/>
+            <a:ext cx="5120640" cy="2377440"/>
           </a:xfrm>
           <a:prstGeom prst="roundRect">
             <a:avLst/>
@@ -9269,8 +10687,8 @@
         </p:nvSpPr>
         <p:spPr>
           <a:xfrm>
-            <a:off x="1051560" y="1746504"/>
-            <a:ext cx="4663440" cy="411480"/>
+            <a:off x="1051560" y="1874519"/>
+            <a:ext cx="4572000" cy="457200"/>
           </a:xfrm>
           <a:prstGeom prst="rect">
             <a:avLst/>
@@ -9292,13 +10710,13 @@
               </a:spcAft>
             </a:pPr>
             <a:r>
-              <a:rPr sz="1400" b="1">
-                <a:solidFill>
-                  <a:srgbClr val="E2E8F0"/>
-                </a:solidFill>
-                <a:latin typeface="Segoe UI"/>
-              </a:rPr>
-              <a:t>API SNCF /places · /journeys</a:t>
+              <a:rPr sz="1600" b="1">
+                <a:solidFill>
+                  <a:srgbClr val="38BDF8"/>
+                </a:solidFill>
+                <a:latin typeface="Segoe UI"/>
+              </a:rPr>
+              <a:t>Chaque ville = un vecteur</a:t>
             </a:r>
           </a:p>
         </p:txBody>
@@ -9311,8 +10729,8 @@
         </p:nvSpPr>
         <p:spPr>
           <a:xfrm>
-            <a:off x="5760720" y="1746504"/>
-            <a:ext cx="4206240" cy="411480"/>
+            <a:off x="1051560" y="2377440"/>
+            <a:ext cx="4663440" cy="1645920"/>
           </a:xfrm>
           <a:prstGeom prst="rect">
             <a:avLst/>
@@ -9330,17 +10748,93 @@
                 <a:spcPct val="100000"/>
               </a:lnSpc>
               <a:spcAft>
-                <a:spcPts val="800"/>
+                <a:spcPts val="500"/>
+              </a:spcAft>
+            </a:pPr>
+            <a:r>
+              <a:rPr sz="1350" b="0">
+                <a:solidFill>
+                  <a:srgbClr val="94A3B8"/>
+                </a:solidFill>
+                <a:latin typeface="Segoe UI"/>
+              </a:rPr>
+              <a:t>nb de POIs par catégorie :</a:t>
+            </a:r>
+          </a:p>
+          <a:p>
+            <a:pPr algn="l">
+              <a:lnSpc>
+                <a:spcPct val="100000"/>
+              </a:lnSpc>
+              <a:spcAft>
+                <a:spcPts val="500"/>
               </a:spcAft>
             </a:pPr>
             <a:r>
               <a:rPr sz="1300" b="0">
                 <a:solidFill>
-                  <a:srgbClr val="94A3B8"/>
-                </a:solidFill>
-                <a:latin typeface="Segoe UI"/>
-              </a:rPr>
-              <a:t>résolution des gares, durée du trajet, CO₂ train</a:t>
+                  <a:srgbClr val="E2E8F0"/>
+                </a:solidFill>
+                <a:latin typeface="Consolas"/>
+              </a:rPr>
+              <a:t>Annecy = [plage 0 · culture 5 · patrim. 3 ·</a:t>
+            </a:r>
+          </a:p>
+          <a:p>
+            <a:pPr algn="l">
+              <a:lnSpc>
+                <a:spcPct val="100000"/>
+              </a:lnSpc>
+              <a:spcAft>
+                <a:spcPts val="500"/>
+              </a:spcAft>
+            </a:pPr>
+            <a:r>
+              <a:rPr sz="1300" b="0">
+                <a:solidFill>
+                  <a:srgbClr val="E2E8F0"/>
+                </a:solidFill>
+                <a:latin typeface="Consolas"/>
+              </a:rPr>
+              <a:t>          nature 2 · gastro 4]</a:t>
+            </a:r>
+          </a:p>
+          <a:p>
+            <a:pPr algn="l">
+              <a:lnSpc>
+                <a:spcPct val="100000"/>
+              </a:lnSpc>
+              <a:spcAft>
+                <a:spcPts val="500"/>
+              </a:spcAft>
+            </a:pPr>
+            <a:r>
+              <a:rPr sz="600" b="0">
+                <a:solidFill>
+                  <a:srgbClr val="E2E8F0"/>
+                </a:solidFill>
+                <a:latin typeface="Segoe UI"/>
+              </a:rPr>
+              <a:t> </a:t>
+            </a:r>
+          </a:p>
+          <a:p>
+            <a:pPr algn="l">
+              <a:lnSpc>
+                <a:spcPct val="100000"/>
+              </a:lnSpc>
+              <a:spcAft>
+                <a:spcPts val="500"/>
+              </a:spcAft>
+            </a:pPr>
+            <a:r>
+              <a:rPr sz="1300" b="0">
+                <a:solidFill>
+                  <a:srgbClr val="22C55E"/>
+                </a:solidFill>
+                <a:latin typeface="Consolas"/>
+              </a:rPr>
+              <a:t>envies  = [0 · 1 · 1 · 0 · 1]</a:t>
             </a:r>
           </a:p>
         </p:txBody>
@@ -9353,94 +10847,8 @@
         </p:nvSpPr>
         <p:spPr>
           <a:xfrm>
-            <a:off x="10104120" y="1755648"/>
-            <a:ext cx="1097280" cy="384048"/>
-          </a:xfrm>
-          <a:prstGeom prst="roundRect">
-            <a:avLst/>
-          </a:prstGeom>
-          <a:solidFill>
-            <a:srgbClr val="0F172A"/>
-          </a:solidFill>
-          <a:ln>
-            <a:noFill/>
-          </a:ln>
-          <a:effectLst/>
-        </p:spPr>
-        <p:style>
-          <a:lnRef idx="1">
-            <a:schemeClr val="accent1"/>
-          </a:lnRef>
-          <a:fillRef idx="3">
-            <a:schemeClr val="accent1"/>
-          </a:fillRef>
-          <a:effectRef idx="2">
-            <a:schemeClr val="accent1"/>
-          </a:effectRef>
-          <a:fontRef idx="minor">
-            <a:schemeClr val="lt1"/>
-          </a:fontRef>
-        </p:style>
-        <p:txBody>
-          <a:bodyPr rtlCol="0" anchor="ctr"/>
-          <a:lstStyle/>
-          <a:p>
-            <a:pPr algn="ctr"/>
-          </a:p>
-        </p:txBody>
-      </p:sp>
-      <p:sp>
-        <p:nvSpPr>
-          <p:cNvPr id="10" name="TextBox 9"/>
-          <p:cNvSpPr txBox="1"/>
-          <p:nvPr/>
-        </p:nvSpPr>
-        <p:spPr>
-          <a:xfrm>
-            <a:off x="10104120" y="1755648"/>
-            <a:ext cx="1097280" cy="384048"/>
-          </a:xfrm>
-          <a:prstGeom prst="rect">
-            <a:avLst/>
-          </a:prstGeom>
-          <a:noFill/>
-        </p:spPr>
-        <p:txBody>
-          <a:bodyPr wrap="square" anchor="ctr">
-            <a:spAutoFit/>
-          </a:bodyPr>
-          <a:lstStyle/>
-          <a:p>
-            <a:pPr algn="ctr">
-              <a:lnSpc>
-                <a:spcPct val="100000"/>
-              </a:lnSpc>
-              <a:spcAft>
-                <a:spcPts val="0"/>
-              </a:spcAft>
-            </a:pPr>
-            <a:r>
-              <a:rPr sz="1100" b="1">
-                <a:solidFill>
-                  <a:srgbClr val="38BDF8"/>
-                </a:solidFill>
-                <a:latin typeface="Segoe UI"/>
-              </a:rPr>
-              <a:t>central</a:t>
-            </a:r>
-          </a:p>
-        </p:txBody>
-      </p:sp>
-      <p:sp>
-        <p:nvSpPr>
-          <p:cNvPr id="11" name="Rounded Rectangle 10"/>
-          <p:cNvSpPr/>
-          <p:nvPr/>
-        </p:nvSpPr>
-        <p:spPr>
-          <a:xfrm>
-            <a:off x="777240" y="2331720"/>
-            <a:ext cx="10607040" cy="566928"/>
+            <a:off x="6291072" y="1737360"/>
+            <a:ext cx="5120640" cy="2377440"/>
           </a:xfrm>
           <a:prstGeom prst="roundRect">
             <a:avLst/>
@@ -9477,14 +10885,14 @@
       </p:sp>
       <p:sp>
         <p:nvSpPr>
-          <p:cNvPr id="12" name="TextBox 11"/>
+          <p:cNvPr id="10" name="TextBox 9"/>
           <p:cNvSpPr txBox="1"/>
           <p:nvPr/>
         </p:nvSpPr>
         <p:spPr>
           <a:xfrm>
-            <a:off x="1051560" y="2414016"/>
-            <a:ext cx="4663440" cy="411480"/>
+            <a:off x="6565392" y="1874519"/>
+            <a:ext cx="4572000" cy="457200"/>
           </a:xfrm>
           <a:prstGeom prst="rect">
             <a:avLst/>
@@ -9506,27 +10914,27 @@
               </a:spcAft>
             </a:pPr>
             <a:r>
-              <a:rPr sz="1400" b="1">
-                <a:solidFill>
-                  <a:srgbClr val="E2E8F0"/>
-                </a:solidFill>
-                <a:latin typeface="Segoe UI"/>
-              </a:rPr>
-              <a:t>Open-Meteo</a:t>
-            </a:r>
-          </a:p>
-        </p:txBody>
-      </p:sp>
-      <p:sp>
-        <p:nvSpPr>
-          <p:cNvPr id="13" name="TextBox 12"/>
+              <a:rPr sz="1600" b="1">
+                <a:solidFill>
+                  <a:srgbClr val="38BDF8"/>
+                </a:solidFill>
+                <a:latin typeface="Segoe UI"/>
+              </a:rPr>
+              <a:t>Affinité = cos(ville, envies)</a:t>
+            </a:r>
+          </a:p>
+        </p:txBody>
+      </p:sp>
+      <p:sp>
+        <p:nvSpPr>
+          <p:cNvPr id="11" name="TextBox 10"/>
           <p:cNvSpPr txBox="1"/>
           <p:nvPr/>
         </p:nvSpPr>
         <p:spPr>
           <a:xfrm>
-            <a:off x="5760720" y="2414016"/>
-            <a:ext cx="4206240" cy="411480"/>
+            <a:off x="6565392" y="2377440"/>
+            <a:ext cx="4663440" cy="1645920"/>
           </a:xfrm>
           <a:prstGeom prst="rect">
             <a:avLst/>
@@ -9544,161 +10952,88 @@
                 <a:spcPct val="100000"/>
               </a:lnSpc>
               <a:spcAft>
-                <a:spcPts val="800"/>
-              </a:spcAft>
-            </a:pPr>
-            <a:r>
-              <a:rPr sz="1300" b="0">
+                <a:spcPts val="500"/>
+              </a:spcAft>
+            </a:pPr>
+            <a:r>
+              <a:rPr sz="1350" b="0">
                 <a:solidFill>
                   <a:srgbClr val="94A3B8"/>
                 </a:solidFill>
                 <a:latin typeface="Segoe UI"/>
               </a:rPr>
-              <a:t>météo à l'arrivée</a:t>
-            </a:r>
-          </a:p>
-        </p:txBody>
-      </p:sp>
-      <p:sp>
-        <p:nvSpPr>
-          <p:cNvPr id="14" name="Rounded Rectangle 13"/>
-          <p:cNvSpPr/>
-          <p:nvPr/>
-        </p:nvSpPr>
-        <p:spPr>
-          <a:xfrm>
-            <a:off x="10104120" y="2423160"/>
-            <a:ext cx="1097280" cy="384048"/>
-          </a:xfrm>
-          <a:prstGeom prst="roundRect">
-            <a:avLst/>
-          </a:prstGeom>
-          <a:solidFill>
-            <a:srgbClr val="0F172A"/>
-          </a:solidFill>
-          <a:ln>
-            <a:noFill/>
-          </a:ln>
-          <a:effectLst/>
-        </p:spPr>
-        <p:style>
-          <a:lnRef idx="1">
-            <a:schemeClr val="accent1"/>
-          </a:lnRef>
-          <a:fillRef idx="3">
-            <a:schemeClr val="accent1"/>
-          </a:fillRef>
-          <a:effectRef idx="2">
-            <a:schemeClr val="accent1"/>
-          </a:effectRef>
-          <a:fontRef idx="minor">
-            <a:schemeClr val="lt1"/>
-          </a:fontRef>
-        </p:style>
-        <p:txBody>
-          <a:bodyPr rtlCol="0" anchor="ctr"/>
-          <a:lstStyle/>
-          <a:p>
-            <a:pPr algn="ctr"/>
-          </a:p>
-        </p:txBody>
-      </p:sp>
-      <p:sp>
-        <p:nvSpPr>
-          <p:cNvPr id="15" name="TextBox 14"/>
+              <a:t>∈ [0, 1] — à quel point la ville colle aux envies</a:t>
+            </a:r>
+          </a:p>
+          <a:p>
+            <a:pPr algn="l">
+              <a:lnSpc>
+                <a:spcPct val="100000"/>
+              </a:lnSpc>
+              <a:spcAft>
+                <a:spcPts val="500"/>
+              </a:spcAft>
+            </a:pPr>
+            <a:r>
+              <a:rPr sz="600" b="0">
+                <a:solidFill>
+                  <a:srgbClr val="E2E8F0"/>
+                </a:solidFill>
+                <a:latin typeface="Segoe UI"/>
+              </a:rPr>
+              <a:t> </a:t>
+            </a:r>
+          </a:p>
+          <a:p>
+            <a:pPr algn="l">
+              <a:lnSpc>
+                <a:spcPct val="100000"/>
+              </a:lnSpc>
+              <a:spcAft>
+                <a:spcPts val="500"/>
+              </a:spcAft>
+            </a:pPr>
+            <a:r>
+              <a:rPr sz="1500" b="1">
+                <a:solidFill>
+                  <a:srgbClr val="22C55E"/>
+                </a:solidFill>
+                <a:latin typeface="Consolas"/>
+              </a:rPr>
+              <a:t>cos(Annecy, envies) = 0.98</a:t>
+            </a:r>
+          </a:p>
+          <a:p>
+            <a:pPr algn="l">
+              <a:lnSpc>
+                <a:spcPct val="100000"/>
+              </a:lnSpc>
+              <a:spcAft>
+                <a:spcPts val="500"/>
+              </a:spcAft>
+            </a:pPr>
+            <a:r>
+              <a:rPr sz="1350" b="0">
+                <a:solidFill>
+                  <a:srgbClr val="94A3B8"/>
+                </a:solidFill>
+                <a:latin typeface="Segoe UI"/>
+              </a:rPr>
+              <a:t>→ 1er critère du score (poids 0.30)</a:t>
+            </a:r>
+          </a:p>
+        </p:txBody>
+      </p:sp>
+      <p:sp>
+        <p:nvSpPr>
+          <p:cNvPr id="12" name="TextBox 11"/>
           <p:cNvSpPr txBox="1"/>
           <p:nvPr/>
         </p:nvSpPr>
         <p:spPr>
           <a:xfrm>
-            <a:off x="10104120" y="2423160"/>
-            <a:ext cx="1097280" cy="384048"/>
-          </a:xfrm>
-          <a:prstGeom prst="rect">
-            <a:avLst/>
-          </a:prstGeom>
-          <a:noFill/>
-        </p:spPr>
-        <p:txBody>
-          <a:bodyPr wrap="square" anchor="ctr">
-            <a:spAutoFit/>
-          </a:bodyPr>
-          <a:lstStyle/>
-          <a:p>
-            <a:pPr algn="ctr">
-              <a:lnSpc>
-                <a:spcPct val="100000"/>
-              </a:lnSpc>
-              <a:spcAft>
-                <a:spcPts val="0"/>
-              </a:spcAft>
-            </a:pPr>
-            <a:r>
-              <a:rPr sz="1100" b="1">
-                <a:solidFill>
-                  <a:srgbClr val="22C55E"/>
-                </a:solidFill>
-                <a:latin typeface="Segoe UI"/>
-              </a:rPr>
-              <a:t>sans clé</a:t>
-            </a:r>
-          </a:p>
-        </p:txBody>
-      </p:sp>
-      <p:sp>
-        <p:nvSpPr>
-          <p:cNvPr id="16" name="Rounded Rectangle 15"/>
-          <p:cNvSpPr/>
-          <p:nvPr/>
-        </p:nvSpPr>
-        <p:spPr>
-          <a:xfrm>
-            <a:off x="777240" y="2999232"/>
-            <a:ext cx="10607040" cy="566928"/>
-          </a:xfrm>
-          <a:prstGeom prst="roundRect">
-            <a:avLst/>
-          </a:prstGeom>
-          <a:solidFill>
-            <a:srgbClr val="1E293B"/>
-          </a:solidFill>
-          <a:ln>
-            <a:noFill/>
-          </a:ln>
-          <a:effectLst/>
-        </p:spPr>
-        <p:style>
-          <a:lnRef idx="1">
-            <a:schemeClr val="accent1"/>
-          </a:lnRef>
-          <a:fillRef idx="3">
-            <a:schemeClr val="accent1"/>
-          </a:fillRef>
-          <a:effectRef idx="2">
-            <a:schemeClr val="accent1"/>
-          </a:effectRef>
-          <a:fontRef idx="minor">
-            <a:schemeClr val="lt1"/>
-          </a:fontRef>
-        </p:style>
-        <p:txBody>
-          <a:bodyPr rtlCol="0" anchor="ctr"/>
-          <a:lstStyle/>
-          <a:p>
-            <a:pPr algn="ctr"/>
-          </a:p>
-        </p:txBody>
-      </p:sp>
-      <p:sp>
-        <p:nvSpPr>
-          <p:cNvPr id="17" name="TextBox 16"/>
-          <p:cNvSpPr txBox="1"/>
-          <p:nvPr/>
-        </p:nvSpPr>
-        <p:spPr>
-          <a:xfrm>
-            <a:off x="1051560" y="3081528"/>
-            <a:ext cx="4663440" cy="411480"/>
+            <a:off x="777240" y="4434840"/>
+            <a:ext cx="10607040" cy="4572000"/>
           </a:xfrm>
           <a:prstGeom prst="rect">
             <a:avLst/>
@@ -9713,1004 +11048,112 @@
           <a:p>
             <a:pPr algn="l">
               <a:lnSpc>
-                <a:spcPct val="100000"/>
-              </a:lnSpc>
-              <a:spcAft>
-                <a:spcPts val="800"/>
-              </a:spcAft>
-            </a:pPr>
-            <a:r>
-              <a:rPr sz="1400" b="1">
+                <a:spcPct val="115000"/>
+              </a:lnSpc>
+              <a:spcAft>
+                <a:spcPts val="1000"/>
+              </a:spcAft>
+            </a:pPr>
+            <a:r>
+              <a:rPr sz="1500" b="1">
+                <a:solidFill>
+                  <a:srgbClr val="38BDF8"/>
+                </a:solidFill>
+                <a:latin typeface="Segoe UI"/>
+              </a:rPr>
+              <a:t>•  </a:t>
+            </a:r>
+            <a:r>
+              <a:rPr sz="1500" b="1">
                 <a:solidFill>
                   <a:srgbClr val="E2E8F0"/>
                 </a:solidFill>
                 <a:latin typeface="Segoe UI"/>
               </a:rPr>
-              <a:t>DATAtourisme → repli OpenStreetMap</a:t>
-            </a:r>
-          </a:p>
-        </p:txBody>
-      </p:sp>
-      <p:sp>
-        <p:nvSpPr>
-          <p:cNvPr id="18" name="TextBox 17"/>
-          <p:cNvSpPr txBox="1"/>
-          <p:nvPr/>
-        </p:nvSpPr>
-        <p:spPr>
-          <a:xfrm>
-            <a:off x="5760720" y="3081528"/>
-            <a:ext cx="4206240" cy="411480"/>
-          </a:xfrm>
-          <a:prstGeom prst="rect">
-            <a:avLst/>
-          </a:prstGeom>
-          <a:noFill/>
-        </p:spPr>
-        <p:txBody>
-          <a:bodyPr wrap="square">
-            <a:spAutoFit/>
-          </a:bodyPr>
-          <a:lstStyle/>
+              <a:t>Filtrage content-based</a:t>
+            </a:r>
+            <a:r>
+              <a:rPr sz="1500" b="0">
+                <a:solidFill>
+                  <a:srgbClr val="94A3B8"/>
+                </a:solidFill>
+                <a:latin typeface="Segoe UI"/>
+              </a:rPr>
+              <a:t> — pas de boîte noire — on sait toujours pourquoi une ville est proposée</a:t>
+            </a:r>
+          </a:p>
           <a:p>
             <a:pPr algn="l">
               <a:lnSpc>
-                <a:spcPct val="100000"/>
-              </a:lnSpc>
-              <a:spcAft>
-                <a:spcPts val="800"/>
-              </a:spcAft>
-            </a:pPr>
-            <a:r>
-              <a:rPr sz="1300" b="0">
+                <a:spcPct val="115000"/>
+              </a:lnSpc>
+              <a:spcAft>
+                <a:spcPts val="1000"/>
+              </a:spcAft>
+            </a:pPr>
+            <a:r>
+              <a:rPr sz="1500" b="1">
+                <a:solidFill>
+                  <a:srgbClr val="38BDF8"/>
+                </a:solidFill>
+                <a:latin typeface="Segoe UI"/>
+              </a:rPr>
+              <a:t>•  </a:t>
+            </a:r>
+            <a:r>
+              <a:rPr sz="1500" b="1">
+                <a:solidFill>
+                  <a:srgbClr val="E2E8F0"/>
+                </a:solidFill>
+                <a:latin typeface="Segoe UI"/>
+              </a:rPr>
+              <a:t>Personnalisé</a:t>
+            </a:r>
+            <a:r>
+              <a:rPr sz="1500" b="0">
                 <a:solidFill>
                   <a:srgbClr val="94A3B8"/>
                 </a:solidFill>
                 <a:latin typeface="Segoe UI"/>
               </a:rPr>
-              <a:t>POIs touristiques dans le rayon de marche</a:t>
-            </a:r>
-          </a:p>
-        </p:txBody>
-      </p:sp>
-      <p:sp>
-        <p:nvSpPr>
-          <p:cNvPr id="19" name="Rounded Rectangle 18"/>
-          <p:cNvSpPr/>
-          <p:nvPr/>
-        </p:nvSpPr>
-        <p:spPr>
-          <a:xfrm>
-            <a:off x="10104120" y="3090672"/>
-            <a:ext cx="1097280" cy="384048"/>
-          </a:xfrm>
-          <a:prstGeom prst="roundRect">
-            <a:avLst/>
-          </a:prstGeom>
-          <a:solidFill>
-            <a:srgbClr val="0F172A"/>
-          </a:solidFill>
-          <a:ln>
-            <a:noFill/>
-          </a:ln>
-          <a:effectLst/>
-        </p:spPr>
-        <p:style>
-          <a:lnRef idx="1">
-            <a:schemeClr val="accent1"/>
-          </a:lnRef>
-          <a:fillRef idx="3">
-            <a:schemeClr val="accent1"/>
-          </a:fillRef>
-          <a:effectRef idx="2">
-            <a:schemeClr val="accent1"/>
-          </a:effectRef>
-          <a:fontRef idx="minor">
-            <a:schemeClr val="lt1"/>
-          </a:fontRef>
-        </p:style>
-        <p:txBody>
-          <a:bodyPr rtlCol="0" anchor="ctr"/>
-          <a:lstStyle/>
-          <a:p>
-            <a:pPr algn="ctr"/>
-          </a:p>
-        </p:txBody>
-      </p:sp>
-      <p:sp>
-        <p:nvSpPr>
-          <p:cNvPr id="20" name="TextBox 19"/>
-          <p:cNvSpPr txBox="1"/>
-          <p:nvPr/>
-        </p:nvSpPr>
-        <p:spPr>
-          <a:xfrm>
-            <a:off x="10104120" y="3090672"/>
-            <a:ext cx="1097280" cy="384048"/>
-          </a:xfrm>
-          <a:prstGeom prst="rect">
-            <a:avLst/>
-          </a:prstGeom>
-          <a:noFill/>
-        </p:spPr>
-        <p:txBody>
-          <a:bodyPr wrap="square" anchor="ctr">
-            <a:spAutoFit/>
-          </a:bodyPr>
-          <a:lstStyle/>
-          <a:p>
-            <a:pPr algn="ctr">
-              <a:lnSpc>
-                <a:spcPct val="100000"/>
-              </a:lnSpc>
-              <a:spcAft>
-                <a:spcPts val="0"/>
-              </a:spcAft>
-            </a:pPr>
-            <a:r>
-              <a:rPr sz="1100" b="1">
-                <a:solidFill>
-                  <a:srgbClr val="F59E0B"/>
-                </a:solidFill>
-                <a:latin typeface="Segoe UI"/>
-              </a:rPr>
-              <a:t>clé</a:t>
-            </a:r>
-          </a:p>
-        </p:txBody>
-      </p:sp>
-      <p:sp>
-        <p:nvSpPr>
-          <p:cNvPr id="21" name="Rounded Rectangle 20"/>
-          <p:cNvSpPr/>
-          <p:nvPr/>
-        </p:nvSpPr>
-        <p:spPr>
-          <a:xfrm>
-            <a:off x="777240" y="3666744"/>
-            <a:ext cx="10607040" cy="566928"/>
-          </a:xfrm>
-          <a:prstGeom prst="roundRect">
-            <a:avLst/>
-          </a:prstGeom>
-          <a:solidFill>
-            <a:srgbClr val="1E293B"/>
-          </a:solidFill>
-          <a:ln>
-            <a:noFill/>
-          </a:ln>
-          <a:effectLst/>
-        </p:spPr>
-        <p:style>
-          <a:lnRef idx="1">
-            <a:schemeClr val="accent1"/>
-          </a:lnRef>
-          <a:fillRef idx="3">
-            <a:schemeClr val="accent1"/>
-          </a:fillRef>
-          <a:effectRef idx="2">
-            <a:schemeClr val="accent1"/>
-          </a:effectRef>
-          <a:fontRef idx="minor">
-            <a:schemeClr val="lt1"/>
-          </a:fontRef>
-        </p:style>
-        <p:txBody>
-          <a:bodyPr rtlCol="0" anchor="ctr"/>
-          <a:lstStyle/>
-          <a:p>
-            <a:pPr algn="ctr"/>
-          </a:p>
-        </p:txBody>
-      </p:sp>
-      <p:sp>
-        <p:nvSpPr>
-          <p:cNvPr id="22" name="TextBox 21"/>
-          <p:cNvSpPr txBox="1"/>
-          <p:nvPr/>
-        </p:nvSpPr>
-        <p:spPr>
-          <a:xfrm>
-            <a:off x="1051560" y="3749040"/>
-            <a:ext cx="4663440" cy="411480"/>
-          </a:xfrm>
-          <a:prstGeom prst="rect">
-            <a:avLst/>
-          </a:prstGeom>
-          <a:noFill/>
-        </p:spPr>
-        <p:txBody>
-          <a:bodyPr wrap="square">
-            <a:spAutoFit/>
-          </a:bodyPr>
-          <a:lstStyle/>
+              <a:t> — le même classement change si on coche « plage » au lieu de « culture »</a:t>
+            </a:r>
+          </a:p>
           <a:p>
             <a:pPr algn="l">
               <a:lnSpc>
-                <a:spcPct val="100000"/>
-              </a:lnSpc>
-              <a:spcAft>
-                <a:spcPts val="800"/>
-              </a:spcAft>
-            </a:pPr>
-            <a:r>
-              <a:rPr sz="1400" b="1">
+                <a:spcPct val="115000"/>
+              </a:lnSpc>
+              <a:spcAft>
+                <a:spcPts val="1000"/>
+              </a:spcAft>
+            </a:pPr>
+            <a:r>
+              <a:rPr sz="1500" b="1">
+                <a:solidFill>
+                  <a:srgbClr val="38BDF8"/>
+                </a:solidFill>
+                <a:latin typeface="Segoe UI"/>
+              </a:rPr>
+              <a:t>•  </a:t>
+            </a:r>
+            <a:r>
+              <a:rPr sz="1500" b="1">
                 <a:solidFill>
                   <a:srgbClr val="E2E8F0"/>
                 </a:solidFill>
                 <a:latin typeface="Segoe UI"/>
               </a:rPr>
-              <a:t>frequentation-gares (SNCF)</a:t>
-            </a:r>
-          </a:p>
-        </p:txBody>
-      </p:sp>
-      <p:sp>
-        <p:nvSpPr>
-          <p:cNvPr id="23" name="TextBox 22"/>
-          <p:cNvSpPr txBox="1"/>
-          <p:nvPr/>
-        </p:nvSpPr>
-        <p:spPr>
-          <a:xfrm>
-            <a:off x="5760720" y="3749040"/>
-            <a:ext cx="4206240" cy="411480"/>
-          </a:xfrm>
-          <a:prstGeom prst="rect">
-            <a:avLst/>
-          </a:prstGeom>
-          <a:noFill/>
-        </p:spPr>
-        <p:txBody>
-          <a:bodyPr wrap="square">
-            <a:spAutoFit/>
-          </a:bodyPr>
-          <a:lstStyle/>
-          <a:p>
-            <a:pPr algn="l">
-              <a:lnSpc>
-                <a:spcPct val="100000"/>
-              </a:lnSpc>
-              <a:spcAft>
-                <a:spcPts val="800"/>
-              </a:spcAft>
-            </a:pPr>
-            <a:r>
-              <a:rPr sz="1300" b="0">
+              <a:t>Implémentation maison</a:t>
+            </a:r>
+            <a:r>
+              <a:rPr sz="1500" b="0">
                 <a:solidFill>
                   <a:srgbClr val="94A3B8"/>
                 </a:solidFill>
                 <a:latin typeface="Segoe UI"/>
               </a:rPr>
-              <a:t>voyageurs/an → critère « calme »</a:t>
-            </a:r>
-          </a:p>
-        </p:txBody>
-      </p:sp>
-      <p:sp>
-        <p:nvSpPr>
-          <p:cNvPr id="24" name="Rounded Rectangle 23"/>
-          <p:cNvSpPr/>
-          <p:nvPr/>
-        </p:nvSpPr>
-        <p:spPr>
-          <a:xfrm>
-            <a:off x="10104120" y="3758184"/>
-            <a:ext cx="1097280" cy="384048"/>
-          </a:xfrm>
-          <a:prstGeom prst="roundRect">
-            <a:avLst/>
-          </a:prstGeom>
-          <a:solidFill>
-            <a:srgbClr val="0F172A"/>
-          </a:solidFill>
-          <a:ln>
-            <a:noFill/>
-          </a:ln>
-          <a:effectLst/>
-        </p:spPr>
-        <p:style>
-          <a:lnRef idx="1">
-            <a:schemeClr val="accent1"/>
-          </a:lnRef>
-          <a:fillRef idx="3">
-            <a:schemeClr val="accent1"/>
-          </a:fillRef>
-          <a:effectRef idx="2">
-            <a:schemeClr val="accent1"/>
-          </a:effectRef>
-          <a:fontRef idx="minor">
-            <a:schemeClr val="lt1"/>
-          </a:fontRef>
-        </p:style>
-        <p:txBody>
-          <a:bodyPr rtlCol="0" anchor="ctr"/>
-          <a:lstStyle/>
-          <a:p>
-            <a:pPr algn="ctr"/>
-          </a:p>
-        </p:txBody>
-      </p:sp>
-      <p:sp>
-        <p:nvSpPr>
-          <p:cNvPr id="25" name="TextBox 24"/>
-          <p:cNvSpPr txBox="1"/>
-          <p:nvPr/>
-        </p:nvSpPr>
-        <p:spPr>
-          <a:xfrm>
-            <a:off x="10104120" y="3758184"/>
-            <a:ext cx="1097280" cy="384048"/>
-          </a:xfrm>
-          <a:prstGeom prst="rect">
-            <a:avLst/>
-          </a:prstGeom>
-          <a:noFill/>
-        </p:spPr>
-        <p:txBody>
-          <a:bodyPr wrap="square" anchor="ctr">
-            <a:spAutoFit/>
-          </a:bodyPr>
-          <a:lstStyle/>
-          <a:p>
-            <a:pPr algn="ctr">
-              <a:lnSpc>
-                <a:spcPct val="100000"/>
-              </a:lnSpc>
-              <a:spcAft>
-                <a:spcPts val="0"/>
-              </a:spcAft>
-            </a:pPr>
-            <a:r>
-              <a:rPr sz="1100" b="1">
-                <a:solidFill>
-                  <a:srgbClr val="22C55E"/>
-                </a:solidFill>
-                <a:latin typeface="Segoe UI"/>
-              </a:rPr>
-              <a:t>sans clé</a:t>
-            </a:r>
-          </a:p>
-        </p:txBody>
-      </p:sp>
-      <p:sp>
-        <p:nvSpPr>
-          <p:cNvPr id="26" name="Rounded Rectangle 25"/>
-          <p:cNvSpPr/>
-          <p:nvPr/>
-        </p:nvSpPr>
-        <p:spPr>
-          <a:xfrm>
-            <a:off x="777240" y="4334256"/>
-            <a:ext cx="10607040" cy="566928"/>
-          </a:xfrm>
-          <a:prstGeom prst="roundRect">
-            <a:avLst/>
-          </a:prstGeom>
-          <a:solidFill>
-            <a:srgbClr val="1E293B"/>
-          </a:solidFill>
-          <a:ln>
-            <a:noFill/>
-          </a:ln>
-          <a:effectLst/>
-        </p:spPr>
-        <p:style>
-          <a:lnRef idx="1">
-            <a:schemeClr val="accent1"/>
-          </a:lnRef>
-          <a:fillRef idx="3">
-            <a:schemeClr val="accent1"/>
-          </a:fillRef>
-          <a:effectRef idx="2">
-            <a:schemeClr val="accent1"/>
-          </a:effectRef>
-          <a:fontRef idx="minor">
-            <a:schemeClr val="lt1"/>
-          </a:fontRef>
-        </p:style>
-        <p:txBody>
-          <a:bodyPr rtlCol="0" anchor="ctr"/>
-          <a:lstStyle/>
-          <a:p>
-            <a:pPr algn="ctr"/>
-          </a:p>
-        </p:txBody>
-      </p:sp>
-      <p:sp>
-        <p:nvSpPr>
-          <p:cNvPr id="27" name="TextBox 26"/>
-          <p:cNvSpPr txBox="1"/>
-          <p:nvPr/>
-        </p:nvSpPr>
-        <p:spPr>
-          <a:xfrm>
-            <a:off x="1051560" y="4416552"/>
-            <a:ext cx="4663440" cy="411480"/>
-          </a:xfrm>
-          <a:prstGeom prst="rect">
-            <a:avLst/>
-          </a:prstGeom>
-          <a:noFill/>
-        </p:spPr>
-        <p:txBody>
-          <a:bodyPr wrap="square">
-            <a:spAutoFit/>
-          </a:bodyPr>
-          <a:lstStyle/>
-          <a:p>
-            <a:pPr algn="l">
-              <a:lnSpc>
-                <a:spcPct val="100000"/>
-              </a:lnSpc>
-              <a:spcAft>
-                <a:spcPts val="800"/>
-              </a:spcAft>
-            </a:pPr>
-            <a:r>
-              <a:rPr sz="1400" b="1">
-                <a:solidFill>
-                  <a:srgbClr val="E2E8F0"/>
-                </a:solidFill>
-                <a:latin typeface="Segoe UI"/>
-              </a:rPr>
-              <a:t>ADEME Impact CO2</a:t>
-            </a:r>
-          </a:p>
-        </p:txBody>
-      </p:sp>
-      <p:sp>
-        <p:nvSpPr>
-          <p:cNvPr id="28" name="TextBox 27"/>
-          <p:cNvSpPr txBox="1"/>
-          <p:nvPr/>
-        </p:nvSpPr>
-        <p:spPr>
-          <a:xfrm>
-            <a:off x="5760720" y="4416552"/>
-            <a:ext cx="4206240" cy="411480"/>
-          </a:xfrm>
-          <a:prstGeom prst="rect">
-            <a:avLst/>
-          </a:prstGeom>
-          <a:noFill/>
-        </p:spPr>
-        <p:txBody>
-          <a:bodyPr wrap="square">
-            <a:spAutoFit/>
-          </a:bodyPr>
-          <a:lstStyle/>
-          <a:p>
-            <a:pPr algn="l">
-              <a:lnSpc>
-                <a:spcPct val="100000"/>
-              </a:lnSpc>
-              <a:spcAft>
-                <a:spcPts val="800"/>
-              </a:spcAft>
-            </a:pPr>
-            <a:r>
-              <a:rPr sz="1300" b="0">
-                <a:solidFill>
-                  <a:srgbClr val="94A3B8"/>
-                </a:solidFill>
-                <a:latin typeface="Segoe UI"/>
-              </a:rPr>
-              <a:t>CO₂ voiture officiel → économie vs voiture</a:t>
-            </a:r>
-          </a:p>
-        </p:txBody>
-      </p:sp>
-      <p:sp>
-        <p:nvSpPr>
-          <p:cNvPr id="29" name="Rounded Rectangle 28"/>
-          <p:cNvSpPr/>
-          <p:nvPr/>
-        </p:nvSpPr>
-        <p:spPr>
-          <a:xfrm>
-            <a:off x="10104120" y="4425696"/>
-            <a:ext cx="1097280" cy="384048"/>
-          </a:xfrm>
-          <a:prstGeom prst="roundRect">
-            <a:avLst/>
-          </a:prstGeom>
-          <a:solidFill>
-            <a:srgbClr val="0F172A"/>
-          </a:solidFill>
-          <a:ln>
-            <a:noFill/>
-          </a:ln>
-          <a:effectLst/>
-        </p:spPr>
-        <p:style>
-          <a:lnRef idx="1">
-            <a:schemeClr val="accent1"/>
-          </a:lnRef>
-          <a:fillRef idx="3">
-            <a:schemeClr val="accent1"/>
-          </a:fillRef>
-          <a:effectRef idx="2">
-            <a:schemeClr val="accent1"/>
-          </a:effectRef>
-          <a:fontRef idx="minor">
-            <a:schemeClr val="lt1"/>
-          </a:fontRef>
-        </p:style>
-        <p:txBody>
-          <a:bodyPr rtlCol="0" anchor="ctr"/>
-          <a:lstStyle/>
-          <a:p>
-            <a:pPr algn="ctr"/>
-          </a:p>
-        </p:txBody>
-      </p:sp>
-      <p:sp>
-        <p:nvSpPr>
-          <p:cNvPr id="30" name="TextBox 29"/>
-          <p:cNvSpPr txBox="1"/>
-          <p:nvPr/>
-        </p:nvSpPr>
-        <p:spPr>
-          <a:xfrm>
-            <a:off x="10104120" y="4425696"/>
-            <a:ext cx="1097280" cy="384048"/>
-          </a:xfrm>
-          <a:prstGeom prst="rect">
-            <a:avLst/>
-          </a:prstGeom>
-          <a:noFill/>
-        </p:spPr>
-        <p:txBody>
-          <a:bodyPr wrap="square" anchor="ctr">
-            <a:spAutoFit/>
-          </a:bodyPr>
-          <a:lstStyle/>
-          <a:p>
-            <a:pPr algn="ctr">
-              <a:lnSpc>
-                <a:spcPct val="100000"/>
-              </a:lnSpc>
-              <a:spcAft>
-                <a:spcPts val="0"/>
-              </a:spcAft>
-            </a:pPr>
-            <a:r>
-              <a:rPr sz="1100" b="1">
-                <a:solidFill>
-                  <a:srgbClr val="F59E0B"/>
-                </a:solidFill>
-                <a:latin typeface="Segoe UI"/>
-              </a:rPr>
-              <a:t>clé</a:t>
-            </a:r>
-          </a:p>
-        </p:txBody>
-      </p:sp>
-      <p:sp>
-        <p:nvSpPr>
-          <p:cNvPr id="31" name="Rounded Rectangle 30"/>
-          <p:cNvSpPr/>
-          <p:nvPr/>
-        </p:nvSpPr>
-        <p:spPr>
-          <a:xfrm>
-            <a:off x="777240" y="5001768"/>
-            <a:ext cx="10607040" cy="566928"/>
-          </a:xfrm>
-          <a:prstGeom prst="roundRect">
-            <a:avLst/>
-          </a:prstGeom>
-          <a:solidFill>
-            <a:srgbClr val="1E293B"/>
-          </a:solidFill>
-          <a:ln>
-            <a:noFill/>
-          </a:ln>
-          <a:effectLst/>
-        </p:spPr>
-        <p:style>
-          <a:lnRef idx="1">
-            <a:schemeClr val="accent1"/>
-          </a:lnRef>
-          <a:fillRef idx="3">
-            <a:schemeClr val="accent1"/>
-          </a:fillRef>
-          <a:effectRef idx="2">
-            <a:schemeClr val="accent1"/>
-          </a:effectRef>
-          <a:fontRef idx="minor">
-            <a:schemeClr val="lt1"/>
-          </a:fontRef>
-        </p:style>
-        <p:txBody>
-          <a:bodyPr rtlCol="0" anchor="ctr"/>
-          <a:lstStyle/>
-          <a:p>
-            <a:pPr algn="ctr"/>
-          </a:p>
-        </p:txBody>
-      </p:sp>
-      <p:sp>
-        <p:nvSpPr>
-          <p:cNvPr id="32" name="TextBox 31"/>
-          <p:cNvSpPr txBox="1"/>
-          <p:nvPr/>
-        </p:nvSpPr>
-        <p:spPr>
-          <a:xfrm>
-            <a:off x="1051560" y="5084064"/>
-            <a:ext cx="4663440" cy="411480"/>
-          </a:xfrm>
-          <a:prstGeom prst="rect">
-            <a:avLst/>
-          </a:prstGeom>
-          <a:noFill/>
-        </p:spPr>
-        <p:txBody>
-          <a:bodyPr wrap="square">
-            <a:spAutoFit/>
-          </a:bodyPr>
-          <a:lstStyle/>
-          <a:p>
-            <a:pPr algn="l">
-              <a:lnSpc>
-                <a:spcPct val="100000"/>
-              </a:lnSpc>
-              <a:spcAft>
-                <a:spcPts val="800"/>
-              </a:spcAft>
-            </a:pPr>
-            <a:r>
-              <a:rPr sz="1400" b="1">
-                <a:solidFill>
-                  <a:srgbClr val="E2E8F0"/>
-                </a:solidFill>
-                <a:latin typeface="Segoe UI"/>
-              </a:rPr>
-              <a:t>OpenAgenda</a:t>
-            </a:r>
-          </a:p>
-        </p:txBody>
-      </p:sp>
-      <p:sp>
-        <p:nvSpPr>
-          <p:cNvPr id="33" name="TextBox 32"/>
-          <p:cNvSpPr txBox="1"/>
-          <p:nvPr/>
-        </p:nvSpPr>
-        <p:spPr>
-          <a:xfrm>
-            <a:off x="5760720" y="5084064"/>
-            <a:ext cx="4206240" cy="411480"/>
-          </a:xfrm>
-          <a:prstGeom prst="rect">
-            <a:avLst/>
-          </a:prstGeom>
-          <a:noFill/>
-        </p:spPr>
-        <p:txBody>
-          <a:bodyPr wrap="square">
-            <a:spAutoFit/>
-          </a:bodyPr>
-          <a:lstStyle/>
-          <a:p>
-            <a:pPr algn="l">
-              <a:lnSpc>
-                <a:spcPct val="100000"/>
-              </a:lnSpc>
-              <a:spcAft>
-                <a:spcPts val="800"/>
-              </a:spcAft>
-            </a:pPr>
-            <a:r>
-              <a:rPr sz="1300" b="0">
-                <a:solidFill>
-                  <a:srgbClr val="94A3B8"/>
-                </a:solidFill>
-                <a:latin typeface="Segoe UI"/>
-              </a:rPr>
-              <a:t>événements à venir dans la ville</a:t>
-            </a:r>
-          </a:p>
-        </p:txBody>
-      </p:sp>
-      <p:sp>
-        <p:nvSpPr>
-          <p:cNvPr id="34" name="Rounded Rectangle 33"/>
-          <p:cNvSpPr/>
-          <p:nvPr/>
-        </p:nvSpPr>
-        <p:spPr>
-          <a:xfrm>
-            <a:off x="10104120" y="5093208"/>
-            <a:ext cx="1097280" cy="384048"/>
-          </a:xfrm>
-          <a:prstGeom prst="roundRect">
-            <a:avLst/>
-          </a:prstGeom>
-          <a:solidFill>
-            <a:srgbClr val="0F172A"/>
-          </a:solidFill>
-          <a:ln>
-            <a:noFill/>
-          </a:ln>
-          <a:effectLst/>
-        </p:spPr>
-        <p:style>
-          <a:lnRef idx="1">
-            <a:schemeClr val="accent1"/>
-          </a:lnRef>
-          <a:fillRef idx="3">
-            <a:schemeClr val="accent1"/>
-          </a:fillRef>
-          <a:effectRef idx="2">
-            <a:schemeClr val="accent1"/>
-          </a:effectRef>
-          <a:fontRef idx="minor">
-            <a:schemeClr val="lt1"/>
-          </a:fontRef>
-        </p:style>
-        <p:txBody>
-          <a:bodyPr rtlCol="0" anchor="ctr"/>
-          <a:lstStyle/>
-          <a:p>
-            <a:pPr algn="ctr"/>
-          </a:p>
-        </p:txBody>
-      </p:sp>
-      <p:sp>
-        <p:nvSpPr>
-          <p:cNvPr id="35" name="TextBox 34"/>
-          <p:cNvSpPr txBox="1"/>
-          <p:nvPr/>
-        </p:nvSpPr>
-        <p:spPr>
-          <a:xfrm>
-            <a:off x="10104120" y="5093208"/>
-            <a:ext cx="1097280" cy="384048"/>
-          </a:xfrm>
-          <a:prstGeom prst="rect">
-            <a:avLst/>
-          </a:prstGeom>
-          <a:noFill/>
-        </p:spPr>
-        <p:txBody>
-          <a:bodyPr wrap="square" anchor="ctr">
-            <a:spAutoFit/>
-          </a:bodyPr>
-          <a:lstStyle/>
-          <a:p>
-            <a:pPr algn="ctr">
-              <a:lnSpc>
-                <a:spcPct val="100000"/>
-              </a:lnSpc>
-              <a:spcAft>
-                <a:spcPts val="0"/>
-              </a:spcAft>
-            </a:pPr>
-            <a:r>
-              <a:rPr sz="1100" b="1">
-                <a:solidFill>
-                  <a:srgbClr val="F59E0B"/>
-                </a:solidFill>
-                <a:latin typeface="Segoe UI"/>
-              </a:rPr>
-              <a:t>clé</a:t>
-            </a:r>
-          </a:p>
-        </p:txBody>
-      </p:sp>
-      <p:sp>
-        <p:nvSpPr>
-          <p:cNvPr id="36" name="Rounded Rectangle 35"/>
-          <p:cNvSpPr/>
-          <p:nvPr/>
-        </p:nvSpPr>
-        <p:spPr>
-          <a:xfrm>
-            <a:off x="777240" y="5669280"/>
-            <a:ext cx="10607040" cy="566928"/>
-          </a:xfrm>
-          <a:prstGeom prst="roundRect">
-            <a:avLst/>
-          </a:prstGeom>
-          <a:solidFill>
-            <a:srgbClr val="1E293B"/>
-          </a:solidFill>
-          <a:ln>
-            <a:noFill/>
-          </a:ln>
-          <a:effectLst/>
-        </p:spPr>
-        <p:style>
-          <a:lnRef idx="1">
-            <a:schemeClr val="accent1"/>
-          </a:lnRef>
-          <a:fillRef idx="3">
-            <a:schemeClr val="accent1"/>
-          </a:fillRef>
-          <a:effectRef idx="2">
-            <a:schemeClr val="accent1"/>
-          </a:effectRef>
-          <a:fontRef idx="minor">
-            <a:schemeClr val="lt1"/>
-          </a:fontRef>
-        </p:style>
-        <p:txBody>
-          <a:bodyPr rtlCol="0" anchor="ctr"/>
-          <a:lstStyle/>
-          <a:p>
-            <a:pPr algn="ctr"/>
-          </a:p>
-        </p:txBody>
-      </p:sp>
-      <p:sp>
-        <p:nvSpPr>
-          <p:cNvPr id="37" name="TextBox 36"/>
-          <p:cNvSpPr txBox="1"/>
-          <p:nvPr/>
-        </p:nvSpPr>
-        <p:spPr>
-          <a:xfrm>
-            <a:off x="1051560" y="5751576"/>
-            <a:ext cx="4663440" cy="411480"/>
-          </a:xfrm>
-          <a:prstGeom prst="rect">
-            <a:avLst/>
-          </a:prstGeom>
-          <a:noFill/>
-        </p:spPr>
-        <p:txBody>
-          <a:bodyPr wrap="square">
-            <a:spAutoFit/>
-          </a:bodyPr>
-          <a:lstStyle/>
-          <a:p>
-            <a:pPr algn="l">
-              <a:lnSpc>
-                <a:spcPct val="100000"/>
-              </a:lnSpc>
-              <a:spcAft>
-                <a:spcPts val="800"/>
-              </a:spcAft>
-            </a:pPr>
-            <a:r>
-              <a:rPr sz="1400" b="1">
-                <a:solidFill>
-                  <a:srgbClr val="E2E8F0"/>
-                </a:solidFill>
-                <a:latin typeface="Segoe UI"/>
-              </a:rPr>
-              <a:t>gares-de-voyageurs (SNCF)</a:t>
-            </a:r>
-          </a:p>
-        </p:txBody>
-      </p:sp>
-      <p:sp>
-        <p:nvSpPr>
-          <p:cNvPr id="38" name="TextBox 37"/>
-          <p:cNvSpPr txBox="1"/>
-          <p:nvPr/>
-        </p:nvSpPr>
-        <p:spPr>
-          <a:xfrm>
-            <a:off x="5760720" y="5751576"/>
-            <a:ext cx="4206240" cy="411480"/>
-          </a:xfrm>
-          <a:prstGeom prst="rect">
-            <a:avLst/>
-          </a:prstGeom>
-          <a:noFill/>
-        </p:spPr>
-        <p:txBody>
-          <a:bodyPr wrap="square">
-            <a:spAutoFit/>
-          </a:bodyPr>
-          <a:lstStyle/>
-          <a:p>
-            <a:pPr algn="l">
-              <a:lnSpc>
-                <a:spcPct val="100000"/>
-              </a:lnSpc>
-              <a:spcAft>
-                <a:spcPts val="800"/>
-              </a:spcAft>
-            </a:pPr>
-            <a:r>
-              <a:rPr sz="1300" b="0">
-                <a:solidFill>
-                  <a:srgbClr val="94A3B8"/>
-                </a:solidFill>
-                <a:latin typeface="Segoe UI"/>
-              </a:rPr>
-              <a:t>référentiel des 2 782 gares de départ</a:t>
-            </a:r>
-          </a:p>
-        </p:txBody>
-      </p:sp>
-      <p:sp>
-        <p:nvSpPr>
-          <p:cNvPr id="39" name="Rounded Rectangle 38"/>
-          <p:cNvSpPr/>
-          <p:nvPr/>
-        </p:nvSpPr>
-        <p:spPr>
-          <a:xfrm>
-            <a:off x="10104120" y="5760720"/>
-            <a:ext cx="1097280" cy="384048"/>
-          </a:xfrm>
-          <a:prstGeom prst="roundRect">
-            <a:avLst/>
-          </a:prstGeom>
-          <a:solidFill>
-            <a:srgbClr val="0F172A"/>
-          </a:solidFill>
-          <a:ln>
-            <a:noFill/>
-          </a:ln>
-          <a:effectLst/>
-        </p:spPr>
-        <p:style>
-          <a:lnRef idx="1">
-            <a:schemeClr val="accent1"/>
-          </a:lnRef>
-          <a:fillRef idx="3">
-            <a:schemeClr val="accent1"/>
-          </a:fillRef>
-          <a:effectRef idx="2">
-            <a:schemeClr val="accent1"/>
-          </a:effectRef>
-          <a:fontRef idx="minor">
-            <a:schemeClr val="lt1"/>
-          </a:fontRef>
-        </p:style>
-        <p:txBody>
-          <a:bodyPr rtlCol="0" anchor="ctr"/>
-          <a:lstStyle/>
-          <a:p>
-            <a:pPr algn="ctr"/>
-          </a:p>
-        </p:txBody>
-      </p:sp>
-      <p:sp>
-        <p:nvSpPr>
-          <p:cNvPr id="40" name="TextBox 39"/>
-          <p:cNvSpPr txBox="1"/>
-          <p:nvPr/>
-        </p:nvSpPr>
-        <p:spPr>
-          <a:xfrm>
-            <a:off x="10104120" y="5760720"/>
-            <a:ext cx="1097280" cy="384048"/>
-          </a:xfrm>
-          <a:prstGeom prst="rect">
-            <a:avLst/>
-          </a:prstGeom>
-          <a:noFill/>
-        </p:spPr>
-        <p:txBody>
-          <a:bodyPr wrap="square" anchor="ctr">
-            <a:spAutoFit/>
-          </a:bodyPr>
-          <a:lstStyle/>
-          <a:p>
-            <a:pPr algn="ctr">
-              <a:lnSpc>
-                <a:spcPct val="100000"/>
-              </a:lnSpc>
-              <a:spcAft>
-                <a:spcPts val="0"/>
-              </a:spcAft>
-            </a:pPr>
-            <a:r>
-              <a:rPr sz="1100" b="1">
-                <a:solidFill>
-                  <a:srgbClr val="22C55E"/>
-                </a:solidFill>
-                <a:latin typeface="Segoe UI"/>
-              </a:rPr>
-              <a:t>sans clé</a:t>
+              <a:t> — ml.py, ~30 lignes, numpy uniquement</a:t>
             </a:r>
           </a:p>
         </p:txBody>
@@ -10807,14 +11250,6 @@
           </a:bodyPr>
           <a:lstStyle/>
           <a:p>
-            <a:pPr algn="l">
-              <a:lnSpc>
-                <a:spcPct val="100000"/>
-              </a:lnSpc>
-              <a:spcAft>
-                <a:spcPts val="800"/>
-              </a:spcAft>
-            </a:pPr>
             <a:r>
               <a:rPr sz="2900" b="1">
                 <a:solidFill>
@@ -10822,7 +11257,7 @@
                 </a:solidFill>
                 <a:latin typeface="Segoe UI"/>
               </a:rPr>
-              <a:t>Machine learning — affinité content-based</a:t>
+              <a:t>Machine learning 2/2 — profils de villes appris (k-means)</a:t>
             </a:r>
           </a:p>
         </p:txBody>
@@ -10849,14 +11284,6 @@
           </a:bodyPr>
           <a:lstStyle/>
           <a:p>
-            <a:pPr algn="l">
-              <a:lnSpc>
-                <a:spcPct val="100000"/>
-              </a:lnSpc>
-              <a:spcAft>
-                <a:spcPts val="800"/>
-              </a:spcAft>
-            </a:pPr>
             <a:r>
               <a:rPr sz="1400" b="0">
                 <a:solidFill>
@@ -10864,7 +11291,7 @@
                 </a:solidFill>
                 <a:latin typeface="Segoe UI"/>
               </a:rPr>
-              <a:t>Similarité cosinus entre le profil d'activités de la ville et les envies de l'utilisateur</a:t>
+              <a:t>Clustering non supervisé du mix d'activités (scikit-learn) — la 2e brique ML, apprise sur nos données</a:t>
             </a:r>
           </a:p>
         </p:txBody>
@@ -10891,14 +11318,7 @@
           </a:bodyPr>
           <a:lstStyle/>
           <a:p>
-            <a:pPr algn="r">
-              <a:lnSpc>
-                <a:spcPct val="100000"/>
-              </a:lnSpc>
-              <a:spcAft>
-                <a:spcPts val="800"/>
-              </a:spcAft>
-            </a:pPr>
+            <a:pPr algn="r"/>
             <a:r>
               <a:rPr sz="1300" b="0">
                 <a:solidFill>
@@ -10977,14 +11397,6 @@
           </a:bodyPr>
           <a:lstStyle/>
           <a:p>
-            <a:pPr algn="l">
-              <a:lnSpc>
-                <a:spcPct val="100000"/>
-              </a:lnSpc>
-              <a:spcAft>
-                <a:spcPts val="800"/>
-              </a:spcAft>
-            </a:pPr>
             <a:r>
               <a:rPr sz="1600" b="1">
                 <a:solidFill>
@@ -10992,7 +11404,7 @@
                 </a:solidFill>
                 <a:latin typeface="Segoe UI"/>
               </a:rPr>
-              <a:t>Chaque ville = un vecteur</a:t>
+              <a:t>k-means sur le mix d'activités</a:t>
             </a:r>
           </a:p>
         </p:txBody>
@@ -11019,14 +11431,6 @@
           </a:bodyPr>
           <a:lstStyle/>
           <a:p>
-            <a:pPr algn="l">
-              <a:lnSpc>
-                <a:spcPct val="100000"/>
-              </a:lnSpc>
-              <a:spcAft>
-                <a:spcPts val="500"/>
-              </a:spcAft>
-            </a:pPr>
             <a:r>
               <a:rPr sz="1350" b="0">
                 <a:solidFill>
@@ -11034,18 +11438,21 @@
                 </a:solidFill>
                 <a:latin typeface="Segoe UI"/>
               </a:rPr>
-              <a:t>nb de POIs par catégorie :</a:t>
-            </a:r>
-          </a:p>
-          <a:p>
-            <a:pPr algn="l">
-              <a:lnSpc>
-                <a:spcPct val="100000"/>
-              </a:lnSpc>
-              <a:spcAft>
-                <a:spcPts val="500"/>
-              </a:spcAft>
-            </a:pPr>
+              <a:t>proportions de POIs, pas volumes — une petite ville très « patrimoine » rejoint les grandes</a:t>
+            </a:r>
+          </a:p>
+          <a:p>
+            <a:r>
+              <a:rPr sz="600" b="0">
+                <a:solidFill>
+                  <a:srgbClr val="E2E8F0"/>
+                </a:solidFill>
+                <a:latin typeface="Segoe UI"/>
+              </a:rPr>
+              <a:t> </a:t>
+            </a:r>
+          </a:p>
+          <a:p>
             <a:r>
               <a:rPr sz="1300" b="0">
                 <a:solidFill>
@@ -11053,64 +11460,27 @@
                 </a:solidFill>
                 <a:latin typeface="Consolas"/>
               </a:rPr>
-              <a:t>Annecy = [plage 0 · culture 5 · patrim. 3 ·</a:t>
-            </a:r>
-          </a:p>
-          <a:p>
-            <a:pPr algn="l">
-              <a:lnSpc>
-                <a:spcPct val="100000"/>
-              </a:lnSpc>
-              <a:spcAft>
-                <a:spcPts val="500"/>
-              </a:spcAft>
-            </a:pPr>
-            <a:r>
-              <a:rPr sz="1300" b="0">
-                <a:solidFill>
-                  <a:srgbClr val="E2E8F0"/>
-                </a:solidFill>
-                <a:latin typeface="Consolas"/>
-              </a:rPr>
-              <a:t>          nature 2 · gastro 4]</a:t>
-            </a:r>
-          </a:p>
-          <a:p>
-            <a:pPr algn="l">
-              <a:lnSpc>
-                <a:spcPct val="100000"/>
-              </a:lnSpc>
-              <a:spcAft>
-                <a:spcPts val="500"/>
-              </a:spcAft>
-            </a:pPr>
-            <a:r>
-              <a:rPr sz="600" b="0">
-                <a:solidFill>
-                  <a:srgbClr val="E2E8F0"/>
-                </a:solidFill>
-                <a:latin typeface="Segoe UI"/>
-              </a:rPr>
-              <a:t> </a:t>
-            </a:r>
-          </a:p>
-          <a:p>
-            <a:pPr algn="l">
-              <a:lnSpc>
-                <a:spcPct val="100000"/>
-              </a:lnSpc>
-              <a:spcAft>
-                <a:spcPts val="500"/>
-              </a:spcAft>
-            </a:pPr>
-            <a:r>
-              <a:rPr sz="1300" b="0">
-                <a:solidFill>
-                  <a:srgbClr val="22C55E"/>
-                </a:solidFill>
-                <a:latin typeface="Consolas"/>
-              </a:rPr>
-              <a:t>envies  = [0 · 1 · 1 · 0 · 1]</a:t>
+              <a:t>z-scores par catégorie</a:t>
+            </a:r>
+            <a:r>
+              <a:rPr sz="1350" b="0">
+                <a:solidFill>
+                  <a:srgbClr val="94A3B8"/>
+                </a:solidFill>
+                <a:latin typeface="Segoe UI"/>
+              </a:rPr>
+              <a:t> — sinon la gastronomie, omniprésente, écrase plage &amp; nature</a:t>
+            </a:r>
+          </a:p>
+          <a:p>
+            <a:r>
+              <a:rPr sz="1350" b="0">
+                <a:solidFill>
+                  <a:srgbClr val="94A3B8"/>
+                </a:solidFill>
+                <a:latin typeface="Segoe UI"/>
+              </a:rPr>
+              <a:t>k choisi par silhouette (2–5) · random_state fixé → reproductible</a:t>
             </a:r>
           </a:p>
         </p:txBody>
@@ -11181,14 +11551,6 @@
           </a:bodyPr>
           <a:lstStyle/>
           <a:p>
-            <a:pPr algn="l">
-              <a:lnSpc>
-                <a:spcPct val="100000"/>
-              </a:lnSpc>
-              <a:spcAft>
-                <a:spcPts val="800"/>
-              </a:spcAft>
-            </a:pPr>
             <a:r>
               <a:rPr sz="1600" b="1">
                 <a:solidFill>
@@ -11196,7 +11558,7 @@
                 </a:solidFill>
                 <a:latin typeface="Segoe UI"/>
               </a:rPr>
-              <a:t>Affinité = cos(ville, envies)</a:t>
+              <a:t>Clusters nommés → explicable</a:t>
             </a:r>
           </a:p>
         </p:txBody>
@@ -11223,14 +11585,6 @@
           </a:bodyPr>
           <a:lstStyle/>
           <a:p>
-            <a:pPr algn="l">
-              <a:lnSpc>
-                <a:spcPct val="100000"/>
-              </a:lnSpc>
-              <a:spcAft>
-                <a:spcPts val="500"/>
-              </a:spcAft>
-            </a:pPr>
             <a:r>
               <a:rPr sz="1350" b="0">
                 <a:solidFill>
@@ -11238,18 +11592,10 @@
                 </a:solidFill>
                 <a:latin typeface="Segoe UI"/>
               </a:rPr>
-              <a:t>∈ [0, 1] — à quel point la ville colle aux envies</a:t>
-            </a:r>
-          </a:p>
-          <a:p>
-            <a:pPr algn="l">
-              <a:lnSpc>
-                <a:spcPct val="100000"/>
-              </a:lnSpc>
-              <a:spcAft>
-                <a:spcPts val="500"/>
-              </a:spcAft>
-            </a:pPr>
+              <a:t>nom = catégories sur-représentées du centroïde — sortie réelle :</a:t>
+            </a:r>
+          </a:p>
+          <a:p>
             <a:r>
               <a:rPr sz="600" b="0">
                 <a:solidFill>
@@ -11261,41 +11607,25 @@
             </a:r>
           </a:p>
           <a:p>
-            <a:pPr algn="l">
-              <a:lnSpc>
-                <a:spcPct val="100000"/>
-              </a:lnSpc>
-              <a:spcAft>
-                <a:spcPts val="500"/>
-              </a:spcAft>
-            </a:pPr>
-            <a:r>
-              <a:rPr sz="1500" b="1">
+            <a:r>
+              <a:rPr sz="1300" b="0">
+                <a:solidFill>
+                  <a:srgbClr val="E2E8F0"/>
+                </a:solidFill>
+                <a:latin typeface="Consolas"/>
+              </a:rPr>
+              <a:t>Lille Europe → 🏛️ Patrimoine &amp; culture</a:t>
+            </a:r>
+          </a:p>
+          <a:p>
+            <a:r>
+              <a:rPr sz="1300" b="1">
                 <a:solidFill>
                   <a:srgbClr val="22C55E"/>
                 </a:solidFill>
                 <a:latin typeface="Consolas"/>
               </a:rPr>
-              <a:t>cos(Annecy, envies) = 0.98</a:t>
-            </a:r>
-          </a:p>
-          <a:p>
-            <a:pPr algn="l">
-              <a:lnSpc>
-                <a:spcPct val="100000"/>
-              </a:lnSpc>
-              <a:spcAft>
-                <a:spcPts val="500"/>
-              </a:spcAft>
-            </a:pPr>
-            <a:r>
-              <a:rPr sz="1350" b="0">
-                <a:solidFill>
-                  <a:srgbClr val="94A3B8"/>
-                </a:solidFill>
-                <a:latin typeface="Segoe UI"/>
-              </a:rPr>
-              <a:t>→ 1er critère du score (poids 0.30)</a:t>
+              <a:t>même profil : Rennes 0.98 · Strasbourg 0.96</a:t>
             </a:r>
           </a:p>
         </p:txBody>
@@ -11309,7 +11639,7 @@
         <p:spPr>
           <a:xfrm>
             <a:off x="777240" y="4434840"/>
-            <a:ext cx="10607040" cy="4572000"/>
+            <a:ext cx="10607040" cy="2011680"/>
           </a:xfrm>
           <a:prstGeom prst="rect">
             <a:avLst/>
@@ -11322,14 +11652,6 @@
           </a:bodyPr>
           <a:lstStyle/>
           <a:p>
-            <a:pPr algn="l">
-              <a:lnSpc>
-                <a:spcPct val="115000"/>
-              </a:lnSpc>
-              <a:spcAft>
-                <a:spcPts val="1000"/>
-              </a:spcAft>
-            </a:pPr>
             <a:r>
               <a:rPr sz="1500" b="1">
                 <a:solidFill>
@@ -11346,7 +11668,7 @@
                 </a:solidFill>
                 <a:latin typeface="Segoe UI"/>
               </a:rPr>
-              <a:t>Filtrage content-based</a:t>
+              <a:t>« Villes au même profil »</a:t>
             </a:r>
             <a:r>
               <a:rPr sz="1500" b="0">
@@ -11355,18 +11677,10 @@
                 </a:solidFill>
                 <a:latin typeface="Segoe UI"/>
               </a:rPr>
-              <a:t> — pas de boîte noire — on sait toujours pourquoi une ville est proposée</a:t>
-            </a:r>
-          </a:p>
-          <a:p>
-            <a:pPr algn="l">
-              <a:lnSpc>
-                <a:spcPct val="115000"/>
-              </a:lnSpc>
-              <a:spcAft>
-                <a:spcPts val="1000"/>
-              </a:spcAft>
-            </a:pPr>
+              <a:t> — la 1re reco ne convient pas ? alternatives au même ADN d'activités, triées par similarité cosinus</a:t>
+            </a:r>
+          </a:p>
+          <a:p>
             <a:r>
               <a:rPr sz="1500" b="1">
                 <a:solidFill>
@@ -11383,7 +11697,7 @@
                 </a:solidFill>
                 <a:latin typeface="Segoe UI"/>
               </a:rPr>
-              <a:t>Personnalisé</a:t>
+              <a:t>Modèle appris, non supervisé</a:t>
             </a:r>
             <a:r>
               <a:rPr sz="1500" b="0">
@@ -11392,18 +11706,10 @@
                 </a:solidFill>
                 <a:latin typeface="Segoe UI"/>
               </a:rPr>
-              <a:t> — le même classement change si on coche « plage » au lieu de « culture »</a:t>
-            </a:r>
-          </a:p>
-          <a:p>
-            <a:pPr algn="l">
-              <a:lnSpc>
-                <a:spcPct val="115000"/>
-              </a:lnSpc>
-              <a:spcAft>
-                <a:spcPts val="1000"/>
-              </a:spcAft>
-            </a:pPr>
+              <a:t> — entraîné à chaque exécution sur les POIs collectés, sans étiquettes ni boîte noire</a:t>
+            </a:r>
+          </a:p>
+          <a:p>
             <a:r>
               <a:rPr sz="1500" b="1">
                 <a:solidFill>
@@ -11420,7 +11726,7 @@
                 </a:solidFill>
                 <a:latin typeface="Segoe UI"/>
               </a:rPr>
-              <a:t>Implémentation maison</a:t>
+              <a:t>Affiché partout</a:t>
             </a:r>
             <a:r>
               <a:rPr sz="1500" b="0">
@@ -11429,7 +11735,7 @@
                 </a:solidFill>
                 <a:latin typeface="Segoe UI"/>
               </a:rPr>
-              <a:t> — ml.py, ~30 lignes, numpy uniquement</a:t>
+              <a:t> — bandeau 🧭 + colonne Profil dans l'app Streamlit et la CLI</a:t>
             </a:r>
           </a:p>
         </p:txBody>

--- a/docs/presentation_escapade_v2.pptx
+++ b/docs/presentation_escapade_v2.pptx
@@ -5021,7 +5021,7 @@
                 </a:solidFill>
                 <a:latin typeface="Segoe UI"/>
               </a:rPr>
-              <a:t>15 destinations codées en dur</a:t>
+              <a:t>Candidates choisies par fréquentation — heuristique</a:t>
             </a:r>
             <a:r>
               <a:rPr sz="1450" b="0">
@@ -5234,7 +5234,7 @@
                 </a:solidFill>
                 <a:latin typeface="Segoe UI"/>
               </a:rPr>
-              <a:t>Destinations dynamiques</a:t>
+              <a:t>Sélection touristique des candidates</a:t>
             </a:r>
             <a:r>
               <a:rPr sz="1450" b="0">
@@ -5243,7 +5243,7 @@
                 </a:solidFill>
                 <a:latin typeface="Segoe UI"/>
               </a:rPr>
-              <a:t> — toute gare à ≤ X h (isochrones)</a:t>
+              <a:t> — pondérer par la densité de POIs</a:t>
             </a:r>
           </a:p>
           <a:p>
@@ -6753,7 +6753,7 @@
                 </a:solidFill>
                 <a:latin typeface="Segoe UI"/>
               </a:rPr>
-              <a:t>trajet SNCF + météo + activités à pied + affluence + CO₂  →  score pondéré explicable</a:t>
+              <a:t>trajet + isochrone SNCF + météo + activités à pied + affluence + CO₂  →  score pondéré explicable</a:t>
             </a:r>
           </a:p>
         </p:txBody>
@@ -8100,7 +8100,7 @@
                 </a:solidFill>
                 <a:latin typeface="Segoe UI"/>
               </a:rPr>
-              <a:t>/places · /journeys</a:t>
+              <a:t>/places · /journeys · /isochrones</a:t>
             </a:r>
           </a:p>
         </p:txBody>
@@ -9022,7 +9022,7 @@
                 </a:solidFill>
                 <a:latin typeface="Segoe UI"/>
               </a:rPr>
-              <a:t>API SNCF /places · /journeys</a:t>
+              <a:t>API SNCF /places · /journeys · /isochrones</a:t>
             </a:r>
           </a:p>
         </p:txBody>
@@ -9064,7 +9064,7 @@
                 </a:solidFill>
                 <a:latin typeface="Segoe UI"/>
               </a:rPr>
-              <a:t>résolution des gares, durée du trajet, CO₂ train</a:t>
+              <a:t>gares, durée, CO₂ train, zone atteignable en ≤ X h</a:t>
             </a:r>
           </a:p>
         </p:txBody>

--- a/docs/presentation_escapade_v2.pptx
+++ b/docs/presentation_escapade_v2.pptx
@@ -3531,7 +3531,7 @@
                 </a:solidFill>
                 <a:latin typeface="Segoe UI"/>
               </a:rPr>
-              <a:t>Résultat réel — 11 juin 2026</a:t>
+              <a:t>Résultat réel — samedi 13 juin 2026</a:t>
             </a:r>
           </a:p>
         </p:txBody>
@@ -3720,7 +3720,7 @@
                 </a:solidFill>
                 <a:latin typeface="Consolas"/>
               </a:rPr>
-              <a:t>1   Annecy                    3h43      12       0.98      0.91</a:t>
+              <a:t>1   Annecy                    3h43      12       0.98      0.85</a:t>
             </a:r>
           </a:p>
           <a:p>
@@ -3739,7 +3739,7 @@
                 </a:solidFill>
                 <a:latin typeface="Consolas"/>
               </a:rPr>
-              <a:t>2   Avignon Centre            3h40      19       0.89      0.86</a:t>
+              <a:t>2   Avignon Centre            4h24      19       0.89      0.84</a:t>
             </a:r>
           </a:p>
           <a:p>
@@ -3758,7 +3758,7 @@
                 </a:solidFill>
                 <a:latin typeface="Consolas"/>
               </a:rPr>
-              <a:t>3   Montpellier Saint-Roch    3h35      16       0.85      0.82</a:t>
+              <a:t>3   Montpellier Saint-Roch    4h38      16       0.85      0.78</a:t>
             </a:r>
           </a:p>
         </p:txBody>
@@ -5012,7 +5012,7 @@
                 </a:solidFill>
                 <a:latin typeface="Segoe UI"/>
               </a:rPr>
-              <a:t>•  </a:t>
+              <a:t>•  Densité POIs = proxy OSM (repli : fréquentation)</a:t>
             </a:r>
             <a:r>
               <a:rPr sz="1450" b="1">
@@ -5021,7 +5021,7 @@
                 </a:solidFill>
                 <a:latin typeface="Segoe UI"/>
               </a:rPr>
-              <a:t>Candidates choisies par fréquentation — heuristique</a:t>
+              <a:t/>
             </a:r>
             <a:r>
               <a:rPr sz="1450" b="0">
@@ -5049,7 +5049,7 @@
                 </a:solidFill>
                 <a:latin typeface="Segoe UI"/>
               </a:rPr>
-              <a:t>•  </a:t>
+              <a:t>•  Météo limitée à ~16 jours de prévision</a:t>
             </a:r>
             <a:r>
               <a:rPr sz="1450" b="1">
@@ -5058,7 +5058,7 @@
                 </a:solidFill>
                 <a:latin typeface="Segoe UI"/>
               </a:rPr>
-              <a:t>Météo du jour</a:t>
+              <a:t/>
             </a:r>
             <a:r>
               <a:rPr sz="1450" b="0">
@@ -5067,7 +5067,7 @@
                 </a:solidFill>
                 <a:latin typeface="Segoe UI"/>
               </a:rPr>
-              <a:t> — pas la date exacte du week-end</a:t>
+              <a:t/>
             </a:r>
           </a:p>
           <a:p>
@@ -5086,7 +5086,7 @@
                 </a:solidFill>
                 <a:latin typeface="Segoe UI"/>
               </a:rPr>
-              <a:t>•  </a:t>
+              <a:t>•  Min-max winsorisé — peu parlant si peu de villes</a:t>
             </a:r>
             <a:r>
               <a:rPr sz="1450" b="1">
@@ -5095,7 +5095,7 @@
                 </a:solidFill>
                 <a:latin typeface="Segoe UI"/>
               </a:rPr>
-              <a:t>Min-max sensible aux extrêmes</a:t>
+              <a:t/>
             </a:r>
             <a:r>
               <a:rPr sz="1450" b="0">
@@ -5225,7 +5225,7 @@
                 </a:solidFill>
                 <a:latin typeface="Segoe UI"/>
               </a:rPr>
-              <a:t>•  </a:t>
+              <a:t>✓  Fait : candidates classées par densité de POIs</a:t>
             </a:r>
             <a:r>
               <a:rPr sz="1450" b="1">
@@ -5234,7 +5234,7 @@
                 </a:solidFill>
                 <a:latin typeface="Segoe UI"/>
               </a:rPr>
-              <a:t>Sélection touristique des candidates</a:t>
+              <a:t/>
             </a:r>
             <a:r>
               <a:rPr sz="1450" b="0">
@@ -5243,7 +5243,7 @@
                 </a:solidFill>
                 <a:latin typeface="Segoe UI"/>
               </a:rPr>
-              <a:t> — pondérer par la densité de POIs</a:t>
+              <a:t/>
             </a:r>
           </a:p>
           <a:p>
@@ -5262,7 +5262,7 @@
                 </a:solidFill>
                 <a:latin typeface="Segoe UI"/>
               </a:rPr>
-              <a:t>•  </a:t>
+              <a:t>✓  Fait : météo &amp; trains à la date du séjour</a:t>
             </a:r>
             <a:r>
               <a:rPr sz="1450" b="1">
@@ -5271,7 +5271,7 @@
                 </a:solidFill>
                 <a:latin typeface="Segoe UI"/>
               </a:rPr>
-              <a:t>Météo à la date du séjour</a:t>
+              <a:t/>
             </a:r>
             <a:r>
               <a:rPr sz="1450" b="0">
@@ -6581,7 +6581,7 @@
                 </a:solidFill>
                 <a:latin typeface="Segoe UI"/>
               </a:rPr>
-              <a:t>gare de départ (2 782 gares) · centres d'intérêt · rayon de marche 500 m – 2 km · durée max</a:t>
+              <a:t>gare de départ (2 782 gares) · centres d'intérêt · rayon de marche 500 m – 2 km · durée max · date de l'escapade</a:t>
             </a:r>
           </a:p>
         </p:txBody>
@@ -6753,7 +6753,7 @@
                 </a:solidFill>
                 <a:latin typeface="Segoe UI"/>
               </a:rPr>
-              <a:t>trajet + isochrone SNCF + météo + activités à pied + affluence + CO₂  →  score pondéré explicable</a:t>
+              <a:t>trajet + isochrone SNCF + météo à la date choisie + activités à pied + affluence + CO₂  →  score pondéré explicable</a:t>
             </a:r>
           </a:p>
         </p:txBody>
@@ -7298,16 +7298,67 @@
           </a:p>
         </p:txBody>
       </p:sp>
+      <p:sp>
+        <p:nvSpPr>
+          <p:cNvPr id="7" name="TextBox 6"/>
+          <p:cNvSpPr txBox="1"/>
+          <p:nvPr/>
+        </p:nvSpPr>
+        <p:spPr>
+          <a:xfrm>
+            <a:off x="777240" y="6419088"/>
+            <a:ext cx="10607040" cy="365760"/>
+          </a:xfrm>
+          <a:prstGeom prst="rect">
+            <a:avLst/>
+          </a:prstGeom>
+          <a:noFill/>
+        </p:spPr>
+        <p:txBody>
+          <a:bodyPr wrap="square">
+            <a:spAutoFit/>
+          </a:bodyPr>
+          <a:lstStyle/>
+          <a:p>
+            <a:pPr algn="ctr">
+              <a:lnSpc>
+                <a:spcPct val="100000"/>
+              </a:lnSpc>
+              <a:spcAft>
+                <a:spcPts val="800"/>
+              </a:spcAft>
+            </a:pPr>
+            <a:r>
+              <a:rPr sz="1300" b="0">
+                <a:solidFill>
+                  <a:srgbClr val="22C55E"/>
+                </a:solidFill>
+                <a:latin typeface="Consolas"/>
+              </a:rPr>
+              <a:t>streamlit run app.py   →  http://localhost:8501 — capture réelle, données live</a:t>
+            </a:r>
+            <a:r>
+              <a:rPr sz="1300" b="0">
+                <a:solidFill>
+                  <a:srgbClr val="94A3B8"/>
+                </a:solidFill>
+                <a:latin typeface="Segoe UI"/>
+              </a:rPr>
+              <a:t/>
+            </a:r>
+          </a:p>
+        </p:txBody>
+      </p:sp>
       <p:pic>
         <p:nvPicPr>
-          <p:cNvPr id="6" name="Picture 5" descr="app_full.png"/>
+          <p:cNvPr id="8" name="Picture 7" descr="app_screenshot.png"/>
           <p:cNvPicPr>
             <a:picLocks noChangeAspect="1"/>
           </p:cNvPicPr>
           <p:nvPr/>
         </p:nvPicPr>
         <p:blipFill>
-          <a:blip r:embed="rId2"/>
+          <a:blip r:embed="rId3"/>
           <a:stretch>
             <a:fillRect/>
           </a:stretch>
@@ -7320,64 +7371,8 @@
           <a:prstGeom prst="rect">
             <a:avLst/>
           </a:prstGeom>
-          <a:ln w="19050">
-            <a:solidFill>
-              <a:srgbClr val="334155"/>
-            </a:solidFill>
-          </a:ln>
         </p:spPr>
       </p:pic>
-      <p:sp>
-        <p:nvSpPr>
-          <p:cNvPr id="7" name="TextBox 6"/>
-          <p:cNvSpPr txBox="1"/>
-          <p:nvPr/>
-        </p:nvSpPr>
-        <p:spPr>
-          <a:xfrm>
-            <a:off x="777240" y="6419088"/>
-            <a:ext cx="10607040" cy="365760"/>
-          </a:xfrm>
-          <a:prstGeom prst="rect">
-            <a:avLst/>
-          </a:prstGeom>
-          <a:noFill/>
-        </p:spPr>
-        <p:txBody>
-          <a:bodyPr wrap="square">
-            <a:spAutoFit/>
-          </a:bodyPr>
-          <a:lstStyle/>
-          <a:p>
-            <a:pPr algn="ctr">
-              <a:lnSpc>
-                <a:spcPct val="100000"/>
-              </a:lnSpc>
-              <a:spcAft>
-                <a:spcPts val="800"/>
-              </a:spcAft>
-            </a:pPr>
-            <a:r>
-              <a:rPr sz="1300" b="0">
-                <a:solidFill>
-                  <a:srgbClr val="22C55E"/>
-                </a:solidFill>
-                <a:latin typeface="Consolas"/>
-              </a:rPr>
-              <a:t>streamlit run app.py</a:t>
-            </a:r>
-            <a:r>
-              <a:rPr sz="1300" b="0">
-                <a:solidFill>
-                  <a:srgbClr val="94A3B8"/>
-                </a:solidFill>
-                <a:latin typeface="Segoe UI"/>
-              </a:rPr>
-              <a:t>   →  http://localhost:8502 — capture réelle, données live</a:t>
-            </a:r>
-          </a:p>
-        </p:txBody>
-      </p:sp>
     </p:spTree>
   </p:cSld>
   <p:clrMapOvr>
@@ -7942,7 +7937,7 @@
                 </a:solidFill>
                 <a:latin typeface="Segoe UI"/>
               </a:rPr>
-              <a:t>Moteur de recommandation — </a:t>
+              <a:t>Moteur de recommandation — collecte · ML : cosinus + profils k-means · score min-max winsorisé pondéré</a:t>
             </a:r>
             <a:r>
               <a:rPr sz="1400" b="1">
@@ -7951,7 +7946,7 @@
                 </a:solidFill>
                 <a:latin typeface="Segoe UI"/>
               </a:rPr>
-              <a:t>collecte · ML : cosinus + profils k-means · score min-max pondéré</a:t>
+              <a:t/>
             </a:r>
           </a:p>
         </p:txBody>
@@ -9064,7 +9059,7 @@
                 </a:solidFill>
                 <a:latin typeface="Segoe UI"/>
               </a:rPr>
-              <a:t>gares, durée, CO₂ train, zone atteignable en ≤ X h</a:t>
+              <a:t>gares, durée &amp; CO₂ (départ 8 h le jour choisi), zone ≤ X h</a:t>
             </a:r>
           </a:p>
         </p:txBody>
@@ -9278,7 +9273,7 @@
                 </a:solidFill>
                 <a:latin typeface="Segoe UI"/>
               </a:rPr>
-              <a:t>météo à l'arrivée</a:t>
+              <a:t>météo à l'arrivée, à la date de l'escapade</a:t>
             </a:r>
           </a:p>
         </p:txBody>
@@ -9492,7 +9487,7 @@
                 </a:solidFill>
                 <a:latin typeface="Segoe UI"/>
               </a:rPr>
-              <a:t>POIs touristiques dans le rayon de marche</a:t>
+              <a:t>POIs à pied + densité touristique des gares candidates</a:t>
             </a:r>
           </a:p>
         </p:txBody>
@@ -11889,7 +11884,7 @@
                 </a:solidFill>
                 <a:latin typeface="Segoe UI"/>
               </a:rPr>
-              <a:t>Normalisation min-max · pondérations justifiées (guide 06) · détail par critère affiché</a:t>
+              <a:t>Min-max winsorisé (p10–p90) · pondérations justifiées (guide 06) · détail par critère affiché</a:t>
             </a:r>
           </a:p>
         </p:txBody>
